--- a/materials/lecture-slides/Unit2_Lecture1.pptx
+++ b/materials/lecture-slides/Unit2_Lecture1.pptx
@@ -5,7 +5,7 @@
     <p:sldMasterId id="2147483648" r:id="rId1"/>
   </p:sldMasterIdLst>
   <p:notesMasterIdLst>
-    <p:notesMasterId r:id="rId47"/>
+    <p:notesMasterId r:id="rId46"/>
   </p:notesMasterIdLst>
   <p:sldIdLst>
     <p:sldId id="256" r:id="rId2"/>
@@ -32,27 +32,26 @@
     <p:sldId id="481" r:id="rId23"/>
     <p:sldId id="285" r:id="rId24"/>
     <p:sldId id="483" r:id="rId25"/>
-    <p:sldId id="482" r:id="rId26"/>
-    <p:sldId id="286" r:id="rId27"/>
-    <p:sldId id="287" r:id="rId28"/>
-    <p:sldId id="288" r:id="rId29"/>
-    <p:sldId id="485" r:id="rId30"/>
-    <p:sldId id="289" r:id="rId31"/>
-    <p:sldId id="290" r:id="rId32"/>
-    <p:sldId id="291" r:id="rId33"/>
-    <p:sldId id="292" r:id="rId34"/>
-    <p:sldId id="293" r:id="rId35"/>
-    <p:sldId id="294" r:id="rId36"/>
-    <p:sldId id="295" r:id="rId37"/>
-    <p:sldId id="296" r:id="rId38"/>
-    <p:sldId id="478" r:id="rId39"/>
-    <p:sldId id="297" r:id="rId40"/>
-    <p:sldId id="298" r:id="rId41"/>
-    <p:sldId id="299" r:id="rId42"/>
-    <p:sldId id="300" r:id="rId43"/>
-    <p:sldId id="301" r:id="rId44"/>
-    <p:sldId id="302" r:id="rId45"/>
-    <p:sldId id="477" r:id="rId46"/>
+    <p:sldId id="286" r:id="rId26"/>
+    <p:sldId id="287" r:id="rId27"/>
+    <p:sldId id="288" r:id="rId28"/>
+    <p:sldId id="485" r:id="rId29"/>
+    <p:sldId id="289" r:id="rId30"/>
+    <p:sldId id="290" r:id="rId31"/>
+    <p:sldId id="291" r:id="rId32"/>
+    <p:sldId id="292" r:id="rId33"/>
+    <p:sldId id="293" r:id="rId34"/>
+    <p:sldId id="294" r:id="rId35"/>
+    <p:sldId id="295" r:id="rId36"/>
+    <p:sldId id="296" r:id="rId37"/>
+    <p:sldId id="478" r:id="rId38"/>
+    <p:sldId id="297" r:id="rId39"/>
+    <p:sldId id="298" r:id="rId40"/>
+    <p:sldId id="299" r:id="rId41"/>
+    <p:sldId id="300" r:id="rId42"/>
+    <p:sldId id="301" r:id="rId43"/>
+    <p:sldId id="302" r:id="rId44"/>
+    <p:sldId id="477" r:id="rId45"/>
   </p:sldIdLst>
   <p:sldSz cx="12192000" cy="6858000"/>
   <p:notesSz cx="6858000" cy="9144000"/>
@@ -241,7 +240,7 @@
           <a:p>
             <a:fld id="{557B0A92-E371-2A47-9CE1-7F32C6903CCF}" type="datetimeFigureOut">
               <a:rPr lang="en-US" smtClean="0"/>
-              <a:t>10/8/25</a:t>
+              <a:t>11/24/25</a:t>
             </a:fld>
             <a:endParaRPr lang="en-US"/>
           </a:p>
@@ -1976,13 +1975,7 @@
   <p:cSld>
     <p:spTree>
       <p:nvGrpSpPr>
-        <p:cNvPr id="1" name="">
-          <a:extLst>
-            <a:ext uri="{FF2B5EF4-FFF2-40B4-BE49-F238E27FC236}">
-              <a16:creationId xmlns:a16="http://schemas.microsoft.com/office/drawing/2014/main" id="{32415509-D445-A977-28D8-D770941F79AA}"/>
-            </a:ext>
-          </a:extLst>
-        </p:cNvPr>
+        <p:cNvPr id="1" name=""/>
         <p:cNvGrpSpPr/>
         <p:nvPr/>
       </p:nvGrpSpPr>
@@ -1996,13 +1989,7 @@
       </p:grpSpPr>
       <p:sp>
         <p:nvSpPr>
-          <p:cNvPr id="2" name="Slide Image Placeholder 1">
-            <a:extLst>
-              <a:ext uri="{FF2B5EF4-FFF2-40B4-BE49-F238E27FC236}">
-                <a16:creationId xmlns:a16="http://schemas.microsoft.com/office/drawing/2014/main" id="{29111B7E-A206-8FA6-6A2C-F5047AEE3672}"/>
-              </a:ext>
-            </a:extLst>
-          </p:cNvPr>
+          <p:cNvPr id="2" name="Slide Image Placeholder 1"/>
           <p:cNvSpPr>
             <a:spLocks noGrp="1" noRot="1" noChangeAspect="1"/>
           </p:cNvSpPr>
@@ -2014,13 +2001,7 @@
       </p:sp>
       <p:sp>
         <p:nvSpPr>
-          <p:cNvPr id="3" name="Notes Placeholder 2">
-            <a:extLst>
-              <a:ext uri="{FF2B5EF4-FFF2-40B4-BE49-F238E27FC236}">
-                <a16:creationId xmlns:a16="http://schemas.microsoft.com/office/drawing/2014/main" id="{BAC5CDD8-4507-369F-26E7-70CC600578EC}"/>
-              </a:ext>
-            </a:extLst>
-          </p:cNvPr>
+          <p:cNvPr id="3" name="Notes Placeholder 2"/>
           <p:cNvSpPr>
             <a:spLocks noGrp="1"/>
           </p:cNvSpPr>
@@ -2039,13 +2020,7 @@
       </p:sp>
       <p:sp>
         <p:nvSpPr>
-          <p:cNvPr id="4" name="Slide Number Placeholder 3">
-            <a:extLst>
-              <a:ext uri="{FF2B5EF4-FFF2-40B4-BE49-F238E27FC236}">
-                <a16:creationId xmlns:a16="http://schemas.microsoft.com/office/drawing/2014/main" id="{87AADE49-22BC-0435-714A-EA1F0BA1FCEE}"/>
-              </a:ext>
-            </a:extLst>
-          </p:cNvPr>
+          <p:cNvPr id="4" name="Slide Number Placeholder 3"/>
           <p:cNvSpPr>
             <a:spLocks noGrp="1"/>
           </p:cNvSpPr>
@@ -2069,7 +2044,7 @@
     </p:spTree>
     <p:extLst>
       <p:ext uri="{BB962C8B-B14F-4D97-AF65-F5344CB8AC3E}">
-        <p14:creationId xmlns:p14="http://schemas.microsoft.com/office/powerpoint/2010/main" val="3340389217"/>
+        <p14:creationId xmlns:p14="http://schemas.microsoft.com/office/powerpoint/2010/main" val="2096545727"/>
       </p:ext>
     </p:extLst>
   </p:cSld>
@@ -2153,7 +2128,7 @@
     </p:spTree>
     <p:extLst>
       <p:ext uri="{BB962C8B-B14F-4D97-AF65-F5344CB8AC3E}">
-        <p14:creationId xmlns:p14="http://schemas.microsoft.com/office/powerpoint/2010/main" val="2096545727"/>
+        <p14:creationId xmlns:p14="http://schemas.microsoft.com/office/powerpoint/2010/main" val="536969268"/>
       </p:ext>
     </p:extLst>
   </p:cSld>
@@ -2207,7 +2182,7 @@
           <a:bodyPr/>
           <a:lstStyle/>
           <a:p>
-            <a:endParaRPr lang="en-US"/>
+            <a:endParaRPr lang="en-US" dirty="0"/>
           </a:p>
         </p:txBody>
       </p:sp>
@@ -2237,7 +2212,7 @@
     </p:spTree>
     <p:extLst>
       <p:ext uri="{BB962C8B-B14F-4D97-AF65-F5344CB8AC3E}">
-        <p14:creationId xmlns:p14="http://schemas.microsoft.com/office/powerpoint/2010/main" val="536969268"/>
+        <p14:creationId xmlns:p14="http://schemas.microsoft.com/office/powerpoint/2010/main" val="2743439487"/>
       </p:ext>
     </p:extLst>
   </p:cSld>
@@ -2291,42 +2266,7 @@
           <a:bodyPr/>
           <a:lstStyle/>
           <a:p>
-            <a:r>
-              <a:rPr lang="en-US" dirty="0"/>
-              <a:t>NOTE: We are sneakily making the assumption that \beta*(1+r) = 1, so \beta = 1/(1+r).</a:t>
-            </a:r>
-          </a:p>
-          <a:p>
-            <a:r>
-              <a:rPr lang="en-US" dirty="0"/>
-              <a:t>That’s because this is an equilibrium condition in this model.</a:t>
-            </a:r>
-          </a:p>
-          <a:p>
-            <a:endParaRPr lang="en-US" dirty="0"/>
-          </a:p>
-          <a:p>
-            <a:r>
-              <a:rPr lang="en-US" dirty="0"/>
-              <a:t>If you had discount factor \beta = 1 (you don’t discount at all), then you would put all your money in the bank, it will earn interest, and you will be a </a:t>
-            </a:r>
-            <a:r>
-              <a:rPr lang="en-US" dirty="0" err="1"/>
-              <a:t>bijillionaire</a:t>
-            </a:r>
-            <a:r>
-              <a:rPr lang="en-US" dirty="0"/>
-              <a:t> when you die.</a:t>
-            </a:r>
-          </a:p>
-          <a:p>
-            <a:endParaRPr lang="en-US" dirty="0"/>
-          </a:p>
-          <a:p>
-            <a:r>
-              <a:rPr lang="en-US" dirty="0"/>
-              <a:t>If you had discount factor \beta = 0 (you don’t care about the future at all, YOLO), then someone else would say, “hey, I’ll give you $1 today, and tomorrow you pay me $100.  Cool?”  And then that someone else would become a bajillionaire pretty quickly.</a:t>
-            </a:r>
+            <a:endParaRPr lang="en-US"/>
           </a:p>
         </p:txBody>
       </p:sp>
@@ -2347,7 +2287,7 @@
           <a:p>
             <a:fld id="{29E79B22-3695-9E4A-98DF-9C289A3AA777}" type="slidenum">
               <a:rPr lang="en-US" smtClean="0"/>
-              <a:t>28</a:t>
+              <a:t>29</a:t>
             </a:fld>
             <a:endParaRPr lang="en-US"/>
           </a:p>
@@ -2356,7 +2296,7 @@
     </p:spTree>
     <p:extLst>
       <p:ext uri="{BB962C8B-B14F-4D97-AF65-F5344CB8AC3E}">
-        <p14:creationId xmlns:p14="http://schemas.microsoft.com/office/powerpoint/2010/main" val="2743439487"/>
+        <p14:creationId xmlns:p14="http://schemas.microsoft.com/office/powerpoint/2010/main" val="857641543"/>
       </p:ext>
     </p:extLst>
   </p:cSld>
@@ -2410,7 +2350,18 @@
           <a:bodyPr/>
           <a:lstStyle/>
           <a:p>
-            <a:endParaRPr lang="en-US"/>
+            <a:r>
+              <a:rPr lang="en-US"/>
+              <a:t>Do not modify the notes in this section to avoid tampering with the Poll Everywhere activity.
+More info at polleverywhere.com/support
+If you got $10,000 more today, how much "should" you spend today?</a:t>
+            </a:r>
+          </a:p>
+          <a:p>
+            <a:r>
+              <a:rPr lang="en-US"/>
+              <a:t>https://www.polleverywhere.com/multiple_choice_polls/43XqS4QCImaSGzxLQNSg6?state=opened&amp;flow=Default&amp;onscreen=persist</a:t>
+            </a:r>
           </a:p>
         </p:txBody>
       </p:sp>
@@ -2440,7 +2391,7 @@
     </p:spTree>
     <p:extLst>
       <p:ext uri="{BB962C8B-B14F-4D97-AF65-F5344CB8AC3E}">
-        <p14:creationId xmlns:p14="http://schemas.microsoft.com/office/powerpoint/2010/main" val="857641543"/>
+        <p14:creationId xmlns:p14="http://schemas.microsoft.com/office/powerpoint/2010/main" val="3290829239"/>
       </p:ext>
     </p:extLst>
   </p:cSld>
@@ -2582,13 +2533,13 @@
               <a:rPr lang="en-US"/>
               <a:t>Do not modify the notes in this section to avoid tampering with the Poll Everywhere activity.
 More info at polleverywhere.com/support
-If you got $10,000 more today, how much "should" you spend today?</a:t>
+How much "should" you spend today if you'll get 10,000 every year from now on?</a:t>
             </a:r>
           </a:p>
           <a:p>
             <a:r>
               <a:rPr lang="en-US"/>
-              <a:t>https://www.polleverywhere.com/multiple_choice_polls/43XqS4QCImaSGzxLQNSg6?state=opened&amp;flow=Default&amp;onscreen=persist</a:t>
+              <a:t>https://www.polleverywhere.com/multiple_choice_polls/VSROv5CZrTbpyYYfQwDpB?state=opened&amp;flow=Default&amp;onscreen=persist</a:t>
             </a:r>
           </a:p>
         </p:txBody>
@@ -2619,7 +2570,7 @@
     </p:spTree>
     <p:extLst>
       <p:ext uri="{BB962C8B-B14F-4D97-AF65-F5344CB8AC3E}">
-        <p14:creationId xmlns:p14="http://schemas.microsoft.com/office/powerpoint/2010/main" val="3290829239"/>
+        <p14:creationId xmlns:p14="http://schemas.microsoft.com/office/powerpoint/2010/main" val="1951166095"/>
       </p:ext>
     </p:extLst>
   </p:cSld>
@@ -2673,18 +2624,7 @@
           <a:bodyPr/>
           <a:lstStyle/>
           <a:p>
-            <a:r>
-              <a:rPr lang="en-US"/>
-              <a:t>Do not modify the notes in this section to avoid tampering with the Poll Everywhere activity.
-More info at polleverywhere.com/support
-How much "should" you spend today if you'll get 10,000 every year from now on?</a:t>
-            </a:r>
-          </a:p>
-          <a:p>
-            <a:r>
-              <a:rPr lang="en-US"/>
-              <a:t>https://www.polleverywhere.com/multiple_choice_polls/VSROv5CZrTbpyYYfQwDpB?state=opened&amp;flow=Default&amp;onscreen=persist</a:t>
-            </a:r>
+            <a:endParaRPr lang="en-US"/>
           </a:p>
         </p:txBody>
       </p:sp>
@@ -2714,7 +2654,7 @@
     </p:spTree>
     <p:extLst>
       <p:ext uri="{BB962C8B-B14F-4D97-AF65-F5344CB8AC3E}">
-        <p14:creationId xmlns:p14="http://schemas.microsoft.com/office/powerpoint/2010/main" val="1951166095"/>
+        <p14:creationId xmlns:p14="http://schemas.microsoft.com/office/powerpoint/2010/main" val="3903262952"/>
       </p:ext>
     </p:extLst>
   </p:cSld>
@@ -2798,7 +2738,7 @@
     </p:spTree>
     <p:extLst>
       <p:ext uri="{BB962C8B-B14F-4D97-AF65-F5344CB8AC3E}">
-        <p14:creationId xmlns:p14="http://schemas.microsoft.com/office/powerpoint/2010/main" val="3903262952"/>
+        <p14:creationId xmlns:p14="http://schemas.microsoft.com/office/powerpoint/2010/main" val="2531529363"/>
       </p:ext>
     </p:extLst>
   </p:cSld>
@@ -2882,7 +2822,7 @@
     </p:spTree>
     <p:extLst>
       <p:ext uri="{BB962C8B-B14F-4D97-AF65-F5344CB8AC3E}">
-        <p14:creationId xmlns:p14="http://schemas.microsoft.com/office/powerpoint/2010/main" val="2531529363"/>
+        <p14:creationId xmlns:p14="http://schemas.microsoft.com/office/powerpoint/2010/main" val="1047718600"/>
       </p:ext>
     </p:extLst>
   </p:cSld>
@@ -2966,7 +2906,7 @@
     </p:spTree>
     <p:extLst>
       <p:ext uri="{BB962C8B-B14F-4D97-AF65-F5344CB8AC3E}">
-        <p14:creationId xmlns:p14="http://schemas.microsoft.com/office/powerpoint/2010/main" val="1047718600"/>
+        <p14:creationId xmlns:p14="http://schemas.microsoft.com/office/powerpoint/2010/main" val="431977191"/>
       </p:ext>
     </p:extLst>
   </p:cSld>
@@ -3050,7 +2990,7 @@
     </p:spTree>
     <p:extLst>
       <p:ext uri="{BB962C8B-B14F-4D97-AF65-F5344CB8AC3E}">
-        <p14:creationId xmlns:p14="http://schemas.microsoft.com/office/powerpoint/2010/main" val="431977191"/>
+        <p14:creationId xmlns:p14="http://schemas.microsoft.com/office/powerpoint/2010/main" val="2436975231"/>
       </p:ext>
     </p:extLst>
   </p:cSld>
@@ -3134,7 +3074,7 @@
     </p:spTree>
     <p:extLst>
       <p:ext uri="{BB962C8B-B14F-4D97-AF65-F5344CB8AC3E}">
-        <p14:creationId xmlns:p14="http://schemas.microsoft.com/office/powerpoint/2010/main" val="2436975231"/>
+        <p14:creationId xmlns:p14="http://schemas.microsoft.com/office/powerpoint/2010/main" val="2694478229"/>
       </p:ext>
     </p:extLst>
   </p:cSld>
@@ -3218,7 +3158,7 @@
     </p:spTree>
     <p:extLst>
       <p:ext uri="{BB962C8B-B14F-4D97-AF65-F5344CB8AC3E}">
-        <p14:creationId xmlns:p14="http://schemas.microsoft.com/office/powerpoint/2010/main" val="2694478229"/>
+        <p14:creationId xmlns:p14="http://schemas.microsoft.com/office/powerpoint/2010/main" val="1597299298"/>
       </p:ext>
     </p:extLst>
   </p:cSld>
@@ -3272,7 +3212,7 @@
           <a:bodyPr/>
           <a:lstStyle/>
           <a:p>
-            <a:endParaRPr lang="en-US"/>
+            <a:endParaRPr lang="en-US" dirty="0"/>
           </a:p>
         </p:txBody>
       </p:sp>
@@ -3302,7 +3242,7 @@
     </p:spTree>
     <p:extLst>
       <p:ext uri="{BB962C8B-B14F-4D97-AF65-F5344CB8AC3E}">
-        <p14:creationId xmlns:p14="http://schemas.microsoft.com/office/powerpoint/2010/main" val="1597299298"/>
+        <p14:creationId xmlns:p14="http://schemas.microsoft.com/office/powerpoint/2010/main" val="2037770596"/>
       </p:ext>
     </p:extLst>
   </p:cSld>
@@ -3356,7 +3296,7 @@
           <a:bodyPr/>
           <a:lstStyle/>
           <a:p>
-            <a:endParaRPr lang="en-US" dirty="0"/>
+            <a:endParaRPr lang="en-US"/>
           </a:p>
         </p:txBody>
       </p:sp>
@@ -3386,7 +3326,7 @@
     </p:spTree>
     <p:extLst>
       <p:ext uri="{BB962C8B-B14F-4D97-AF65-F5344CB8AC3E}">
-        <p14:creationId xmlns:p14="http://schemas.microsoft.com/office/powerpoint/2010/main" val="2037770596"/>
+        <p14:creationId xmlns:p14="http://schemas.microsoft.com/office/powerpoint/2010/main" val="621502202"/>
       </p:ext>
     </p:extLst>
   </p:cSld>
@@ -3554,7 +3494,7 @@
     </p:spTree>
     <p:extLst>
       <p:ext uri="{BB962C8B-B14F-4D97-AF65-F5344CB8AC3E}">
-        <p14:creationId xmlns:p14="http://schemas.microsoft.com/office/powerpoint/2010/main" val="621502202"/>
+        <p14:creationId xmlns:p14="http://schemas.microsoft.com/office/powerpoint/2010/main" val="3655029697"/>
       </p:ext>
     </p:extLst>
   </p:cSld>
@@ -3638,7 +3578,7 @@
     </p:spTree>
     <p:extLst>
       <p:ext uri="{BB962C8B-B14F-4D97-AF65-F5344CB8AC3E}">
-        <p14:creationId xmlns:p14="http://schemas.microsoft.com/office/powerpoint/2010/main" val="3655029697"/>
+        <p14:creationId xmlns:p14="http://schemas.microsoft.com/office/powerpoint/2010/main" val="4225242082"/>
       </p:ext>
     </p:extLst>
   </p:cSld>
@@ -3722,7 +3662,7 @@
     </p:spTree>
     <p:extLst>
       <p:ext uri="{BB962C8B-B14F-4D97-AF65-F5344CB8AC3E}">
-        <p14:creationId xmlns:p14="http://schemas.microsoft.com/office/powerpoint/2010/main" val="4225242082"/>
+        <p14:creationId xmlns:p14="http://schemas.microsoft.com/office/powerpoint/2010/main" val="3332382380"/>
       </p:ext>
     </p:extLst>
   </p:cSld>
@@ -3795,93 +3735,9 @@
           <a:bodyPr/>
           <a:lstStyle/>
           <a:p>
-            <a:fld id="{29E79B22-3695-9E4A-98DF-9C289A3AA777}" type="slidenum">
+            <a:fld id="{9E1E6818-5228-6746-93C7-81444766F2C7}" type="slidenum">
               <a:rPr lang="en-US" smtClean="0"/>
               <a:t>44</a:t>
-            </a:fld>
-            <a:endParaRPr lang="en-US"/>
-          </a:p>
-        </p:txBody>
-      </p:sp>
-    </p:spTree>
-    <p:extLst>
-      <p:ext uri="{BB962C8B-B14F-4D97-AF65-F5344CB8AC3E}">
-        <p14:creationId xmlns:p14="http://schemas.microsoft.com/office/powerpoint/2010/main" val="3332382380"/>
-      </p:ext>
-    </p:extLst>
-  </p:cSld>
-  <p:clrMapOvr>
-    <a:masterClrMapping/>
-  </p:clrMapOvr>
-</p:notes>
-</file>
-
-<file path=ppt/notesSlides/notesSlide44.xml><?xml version="1.0" encoding="utf-8"?>
-<p:notes xmlns:a="http://schemas.openxmlformats.org/drawingml/2006/main" xmlns:r="http://schemas.openxmlformats.org/officeDocument/2006/relationships" xmlns:p="http://schemas.openxmlformats.org/presentationml/2006/main">
-  <p:cSld>
-    <p:spTree>
-      <p:nvGrpSpPr>
-        <p:cNvPr id="1" name=""/>
-        <p:cNvGrpSpPr/>
-        <p:nvPr/>
-      </p:nvGrpSpPr>
-      <p:grpSpPr>
-        <a:xfrm>
-          <a:off x="0" y="0"/>
-          <a:ext cx="0" cy="0"/>
-          <a:chOff x="0" y="0"/>
-          <a:chExt cx="0" cy="0"/>
-        </a:xfrm>
-      </p:grpSpPr>
-      <p:sp>
-        <p:nvSpPr>
-          <p:cNvPr id="2" name="Slide Image Placeholder 1"/>
-          <p:cNvSpPr>
-            <a:spLocks noGrp="1" noRot="1" noChangeAspect="1"/>
-          </p:cNvSpPr>
-          <p:nvPr>
-            <p:ph type="sldImg"/>
-          </p:nvPr>
-        </p:nvSpPr>
-        <p:spPr/>
-      </p:sp>
-      <p:sp>
-        <p:nvSpPr>
-          <p:cNvPr id="3" name="Notes Placeholder 2"/>
-          <p:cNvSpPr>
-            <a:spLocks noGrp="1"/>
-          </p:cNvSpPr>
-          <p:nvPr>
-            <p:ph type="body" idx="1"/>
-          </p:nvPr>
-        </p:nvSpPr>
-        <p:spPr/>
-        <p:txBody>
-          <a:bodyPr/>
-          <a:lstStyle/>
-          <a:p>
-            <a:endParaRPr lang="en-US"/>
-          </a:p>
-        </p:txBody>
-      </p:sp>
-      <p:sp>
-        <p:nvSpPr>
-          <p:cNvPr id="4" name="Slide Number Placeholder 3"/>
-          <p:cNvSpPr>
-            <a:spLocks noGrp="1"/>
-          </p:cNvSpPr>
-          <p:nvPr>
-            <p:ph type="sldNum" sz="quarter" idx="5"/>
-          </p:nvPr>
-        </p:nvSpPr>
-        <p:spPr/>
-        <p:txBody>
-          <a:bodyPr/>
-          <a:lstStyle/>
-          <a:p>
-            <a:fld id="{9E1E6818-5228-6746-93C7-81444766F2C7}" type="slidenum">
-              <a:rPr lang="en-US" smtClean="0"/>
-              <a:t>45</a:t>
             </a:fld>
             <a:endParaRPr lang="en-US"/>
           </a:p>
@@ -4490,7 +4346,7 @@
           <a:p>
             <a:fld id="{7B1B529C-7AC4-498E-86D4-DC9A7DA9F898}" type="datetimeFigureOut">
               <a:rPr lang="en-US" smtClean="0"/>
-              <a:t>10/8/25</a:t>
+              <a:t>11/24/25</a:t>
             </a:fld>
             <a:endParaRPr lang="en-US"/>
           </a:p>
@@ -4688,7 +4544,7 @@
           <a:p>
             <a:fld id="{7B1B529C-7AC4-498E-86D4-DC9A7DA9F898}" type="datetimeFigureOut">
               <a:rPr lang="en-US" smtClean="0"/>
-              <a:t>10/8/25</a:t>
+              <a:t>11/24/25</a:t>
             </a:fld>
             <a:endParaRPr lang="en-US"/>
           </a:p>
@@ -4948,7 +4804,7 @@
           <a:p>
             <a:fld id="{7B1B529C-7AC4-498E-86D4-DC9A7DA9F898}" type="datetimeFigureOut">
               <a:rPr lang="en-US" smtClean="0"/>
-              <a:t>10/8/25</a:t>
+              <a:t>11/24/25</a:t>
             </a:fld>
             <a:endParaRPr lang="en-US"/>
           </a:p>
@@ -5200,7 +5056,7 @@
           <a:p>
             <a:fld id="{7B1B529C-7AC4-498E-86D4-DC9A7DA9F898}" type="datetimeFigureOut">
               <a:rPr lang="en-US" smtClean="0"/>
-              <a:t>10/8/25</a:t>
+              <a:t>11/24/25</a:t>
             </a:fld>
             <a:endParaRPr lang="en-US"/>
           </a:p>
@@ -5527,7 +5383,7 @@
           <a:p>
             <a:fld id="{7B1B529C-7AC4-498E-86D4-DC9A7DA9F898}" type="datetimeFigureOut">
               <a:rPr lang="en-US" smtClean="0"/>
-              <a:t>10/8/25</a:t>
+              <a:t>11/24/25</a:t>
             </a:fld>
             <a:endParaRPr lang="en-US"/>
           </a:p>
@@ -5844,7 +5700,7 @@
           <a:p>
             <a:fld id="{7B1B529C-7AC4-498E-86D4-DC9A7DA9F898}" type="datetimeFigureOut">
               <a:rPr lang="en-US" smtClean="0"/>
-              <a:t>10/8/25</a:t>
+              <a:t>11/24/25</a:t>
             </a:fld>
             <a:endParaRPr lang="en-US"/>
           </a:p>
@@ -6308,7 +6164,7 @@
           <a:p>
             <a:fld id="{7B1B529C-7AC4-498E-86D4-DC9A7DA9F898}" type="datetimeFigureOut">
               <a:rPr lang="en-US" smtClean="0"/>
-              <a:t>10/8/25</a:t>
+              <a:t>11/24/25</a:t>
             </a:fld>
             <a:endParaRPr lang="en-US"/>
           </a:p>
@@ -6501,7 +6357,7 @@
           <a:p>
             <a:fld id="{7B1B529C-7AC4-498E-86D4-DC9A7DA9F898}" type="datetimeFigureOut">
               <a:rPr lang="en-US" smtClean="0"/>
-              <a:t>10/8/25</a:t>
+              <a:t>11/24/25</a:t>
             </a:fld>
             <a:endParaRPr lang="en-US"/>
           </a:p>
@@ -6666,7 +6522,7 @@
           <a:p>
             <a:fld id="{7B1B529C-7AC4-498E-86D4-DC9A7DA9F898}" type="datetimeFigureOut">
               <a:rPr lang="en-US" smtClean="0"/>
-              <a:t>10/8/25</a:t>
+              <a:t>11/24/25</a:t>
             </a:fld>
             <a:endParaRPr lang="en-US"/>
           </a:p>
@@ -7029,7 +6885,7 @@
           <a:p>
             <a:fld id="{7B1B529C-7AC4-498E-86D4-DC9A7DA9F898}" type="datetimeFigureOut">
               <a:rPr lang="en-US" smtClean="0"/>
-              <a:t>10/8/25</a:t>
+              <a:t>11/24/25</a:t>
             </a:fld>
             <a:endParaRPr lang="en-US"/>
           </a:p>
@@ -7372,7 +7228,7 @@
           <a:p>
             <a:fld id="{7B1B529C-7AC4-498E-86D4-DC9A7DA9F898}" type="datetimeFigureOut">
               <a:rPr lang="en-US" smtClean="0"/>
-              <a:t>10/8/25</a:t>
+              <a:t>11/24/25</a:t>
             </a:fld>
             <a:endParaRPr lang="en-US"/>
           </a:p>
@@ -7706,7 +7562,7 @@
           <a:p>
             <a:fld id="{7B1B529C-7AC4-498E-86D4-DC9A7DA9F898}" type="datetimeFigureOut">
               <a:rPr lang="en-US" smtClean="0"/>
-              <a:t>10/8/25</a:t>
+              <a:t>11/24/25</a:t>
             </a:fld>
             <a:endParaRPr lang="en-US"/>
           </a:p>
@@ -12389,8 +12245,8 @@
           </p:sp>
         </mc:Fallback>
       </mc:AlternateContent>
-      <mc:AlternateContent xmlns:mc="http://schemas.openxmlformats.org/markup-compatibility/2006">
-        <mc:Choice xmlns:a14="http://schemas.microsoft.com/office/drawing/2010/main" Requires="a14">
+      <mc:AlternateContent xmlns:mc="http://schemas.openxmlformats.org/markup-compatibility/2006" xmlns:a14="http://schemas.microsoft.com/office/drawing/2010/main">
+        <mc:Choice Requires="a14">
           <p:sp>
             <p:nvSpPr>
               <p:cNvPr id="17" name="TextBox 16">
@@ -12445,7 +12301,7 @@
             </p:txBody>
           </p:sp>
         </mc:Choice>
-        <mc:Fallback>
+        <mc:Fallback xmlns="">
           <p:sp>
             <p:nvSpPr>
               <p:cNvPr id="17" name="TextBox 16">
@@ -13780,8 +13636,8 @@
           <a:chExt cx="0" cy="0"/>
         </a:xfrm>
       </p:grpSpPr>
-      <mc:AlternateContent xmlns:mc="http://schemas.openxmlformats.org/markup-compatibility/2006">
-        <mc:Choice xmlns:a14="http://schemas.microsoft.com/office/drawing/2010/main" Requires="a14">
+      <mc:AlternateContent xmlns:mc="http://schemas.openxmlformats.org/markup-compatibility/2006" xmlns:a14="http://schemas.microsoft.com/office/drawing/2010/main">
+        <mc:Choice Requires="a14">
           <p:sp>
             <p:nvSpPr>
               <p:cNvPr id="2" name="Title 1">
@@ -13931,7 +13787,7 @@
             </p:txBody>
           </p:sp>
         </mc:Choice>
-        <mc:Fallback>
+        <mc:Fallback xmlns="">
           <p:sp>
             <p:nvSpPr>
               <p:cNvPr id="2" name="Title 1">
@@ -13971,8 +13827,8 @@
           </p:sp>
         </mc:Fallback>
       </mc:AlternateContent>
-      <mc:AlternateContent xmlns:mc="http://schemas.openxmlformats.org/markup-compatibility/2006">
-        <mc:Choice xmlns:a14="http://schemas.microsoft.com/office/drawing/2010/main" Requires="a14">
+      <mc:AlternateContent xmlns:mc="http://schemas.openxmlformats.org/markup-compatibility/2006" xmlns:a14="http://schemas.microsoft.com/office/drawing/2010/main">
+        <mc:Choice Requires="a14">
           <p:sp>
             <p:nvSpPr>
               <p:cNvPr id="3" name="Content Placeholder 2">
@@ -14192,7 +14048,7 @@
             </p:txBody>
           </p:sp>
         </mc:Choice>
-        <mc:Fallback>
+        <mc:Fallback xmlns="">
           <p:sp>
             <p:nvSpPr>
               <p:cNvPr id="3" name="Content Placeholder 2">
@@ -14633,8 +14489,8 @@
           </p:txBody>
         </p:sp>
       </p:grpSp>
-      <mc:AlternateContent xmlns:mc="http://schemas.openxmlformats.org/markup-compatibility/2006">
-        <mc:Choice xmlns:a14="http://schemas.microsoft.com/office/drawing/2010/main" Requires="a14">
+      <mc:AlternateContent xmlns:mc="http://schemas.openxmlformats.org/markup-compatibility/2006" xmlns:a14="http://schemas.microsoft.com/office/drawing/2010/main">
+        <mc:Choice Requires="a14">
           <p:sp>
             <p:nvSpPr>
               <p:cNvPr id="4" name="Content Placeholder 2">
@@ -15080,7 +14936,7 @@
             </p:txBody>
           </p:sp>
         </mc:Choice>
-        <mc:Fallback>
+        <mc:Fallback xmlns="">
           <p:sp>
             <p:nvSpPr>
               <p:cNvPr id="4" name="Content Placeholder 2">
@@ -15125,8 +14981,8 @@
           </p:sp>
         </mc:Fallback>
       </mc:AlternateContent>
-      <mc:AlternateContent xmlns:mc="http://schemas.openxmlformats.org/markup-compatibility/2006">
-        <mc:Choice xmlns:a14="http://schemas.microsoft.com/office/drawing/2010/main" Requires="a14">
+      <mc:AlternateContent xmlns:mc="http://schemas.openxmlformats.org/markup-compatibility/2006" xmlns:a14="http://schemas.microsoft.com/office/drawing/2010/main">
+        <mc:Choice Requires="a14">
           <p:sp>
             <p:nvSpPr>
               <p:cNvPr id="7" name="Content Placeholder 2">
@@ -15389,7 +15245,7 @@
             </p:txBody>
           </p:sp>
         </mc:Choice>
-        <mc:Fallback>
+        <mc:Fallback xmlns="">
           <p:sp>
             <p:nvSpPr>
               <p:cNvPr id="7" name="Content Placeholder 2">
@@ -15513,8 +15369,8 @@
               <a:chExt cx="2946868" cy="1104367"/>
             </a:xfrm>
           </p:grpSpPr>
-          <mc:AlternateContent xmlns:mc="http://schemas.openxmlformats.org/markup-compatibility/2006">
-            <mc:Choice xmlns:a14="http://schemas.microsoft.com/office/drawing/2010/main" Requires="a14">
+          <mc:AlternateContent xmlns:mc="http://schemas.openxmlformats.org/markup-compatibility/2006" xmlns:a14="http://schemas.microsoft.com/office/drawing/2010/main">
+            <mc:Choice Requires="a14">
               <p:sp>
                 <p:nvSpPr>
                   <p:cNvPr id="11" name="TextBox 10">
@@ -15593,7 +15449,7 @@
                 </p:txBody>
               </p:sp>
             </mc:Choice>
-            <mc:Fallback>
+            <mc:Fallback xmlns="">
               <p:sp>
                 <p:nvSpPr>
                   <p:cNvPr id="11" name="TextBox 10">
@@ -15638,8 +15494,8 @@
               </p:sp>
             </mc:Fallback>
           </mc:AlternateContent>
-          <mc:AlternateContent xmlns:mc="http://schemas.openxmlformats.org/markup-compatibility/2006">
-            <mc:Choice xmlns:a14="http://schemas.microsoft.com/office/drawing/2010/main" Requires="a14">
+          <mc:AlternateContent xmlns:mc="http://schemas.openxmlformats.org/markup-compatibility/2006" xmlns:a14="http://schemas.microsoft.com/office/drawing/2010/main">
+            <mc:Choice Requires="a14">
               <p:sp>
                 <p:nvSpPr>
                   <p:cNvPr id="12" name="TextBox 11">
@@ -15718,7 +15574,7 @@
                 </p:txBody>
               </p:sp>
             </mc:Choice>
-            <mc:Fallback>
+            <mc:Fallback xmlns="">
               <p:sp>
                 <p:nvSpPr>
                   <p:cNvPr id="12" name="TextBox 11">
@@ -15763,8 +15619,8 @@
               </p:sp>
             </mc:Fallback>
           </mc:AlternateContent>
-          <mc:AlternateContent xmlns:mc="http://schemas.openxmlformats.org/markup-compatibility/2006">
-            <mc:Choice xmlns:a14="http://schemas.microsoft.com/office/drawing/2010/main" Requires="a14">
+          <mc:AlternateContent xmlns:mc="http://schemas.openxmlformats.org/markup-compatibility/2006" xmlns:a14="http://schemas.microsoft.com/office/drawing/2010/main">
+            <mc:Choice Requires="a14">
               <p:sp>
                 <p:nvSpPr>
                   <p:cNvPr id="13" name="TextBox 12">
@@ -15843,7 +15699,7 @@
                 </p:txBody>
               </p:sp>
             </mc:Choice>
-            <mc:Fallback>
+            <mc:Fallback xmlns="">
               <p:sp>
                 <p:nvSpPr>
                   <p:cNvPr id="13" name="TextBox 12">
@@ -15889,8 +15745,8 @@
             </mc:Fallback>
           </mc:AlternateContent>
         </p:grpSp>
-        <mc:AlternateContent xmlns:mc="http://schemas.openxmlformats.org/markup-compatibility/2006">
-          <mc:Choice xmlns:a14="http://schemas.microsoft.com/office/drawing/2010/main" Requires="a14">
+        <mc:AlternateContent xmlns:mc="http://schemas.openxmlformats.org/markup-compatibility/2006" xmlns:a14="http://schemas.microsoft.com/office/drawing/2010/main">
+          <mc:Choice Requires="a14">
             <p:sp>
               <p:nvSpPr>
                 <p:cNvPr id="18" name="TextBox 17">
@@ -15944,7 +15800,7 @@
               </p:txBody>
             </p:sp>
           </mc:Choice>
-          <mc:Fallback>
+          <mc:Fallback xmlns="">
             <p:sp>
               <p:nvSpPr>
                 <p:cNvPr id="18" name="TextBox 17">
@@ -16485,8 +16341,8 @@
           </a:p>
         </p:txBody>
       </p:sp>
-      <mc:AlternateContent xmlns:mc="http://schemas.openxmlformats.org/markup-compatibility/2006">
-        <mc:Choice xmlns:a14="http://schemas.microsoft.com/office/drawing/2010/main" Requires="a14">
+      <mc:AlternateContent xmlns:mc="http://schemas.openxmlformats.org/markup-compatibility/2006" xmlns:a14="http://schemas.microsoft.com/office/drawing/2010/main">
+        <mc:Choice Requires="a14">
           <p:sp>
             <p:nvSpPr>
               <p:cNvPr id="3" name="Content Placeholder 2">
@@ -16741,7 +16597,7 @@
             </p:txBody>
           </p:sp>
         </mc:Choice>
-        <mc:Fallback>
+        <mc:Fallback xmlns="">
           <p:sp>
             <p:nvSpPr>
               <p:cNvPr id="3" name="Content Placeholder 2">
@@ -17201,8 +17057,8 @@
             <a:chExt cx="3661742" cy="2467192"/>
           </a:xfrm>
         </p:grpSpPr>
-        <mc:AlternateContent xmlns:mc="http://schemas.openxmlformats.org/markup-compatibility/2006">
-          <mc:Choice xmlns:a14="http://schemas.microsoft.com/office/drawing/2010/main" Requires="a14">
+        <mc:AlternateContent xmlns:mc="http://schemas.openxmlformats.org/markup-compatibility/2006" xmlns:a14="http://schemas.microsoft.com/office/drawing/2010/main">
+          <mc:Choice Requires="a14">
             <p:sp>
               <p:nvSpPr>
                 <p:cNvPr id="18" name="TextBox 17">
@@ -17356,7 +17212,7 @@
               </p:txBody>
             </p:sp>
           </mc:Choice>
-          <mc:Fallback>
+          <mc:Fallback xmlns="">
             <p:sp>
               <p:nvSpPr>
                 <p:cNvPr id="18" name="TextBox 17">
@@ -17531,8 +17387,8 @@
             <a:chExt cx="5327782" cy="2500614"/>
           </a:xfrm>
         </p:grpSpPr>
-        <mc:AlternateContent xmlns:mc="http://schemas.openxmlformats.org/markup-compatibility/2006">
-          <mc:Choice xmlns:a14="http://schemas.microsoft.com/office/drawing/2010/main" Requires="a14">
+        <mc:AlternateContent xmlns:mc="http://schemas.openxmlformats.org/markup-compatibility/2006" xmlns:a14="http://schemas.microsoft.com/office/drawing/2010/main">
+          <mc:Choice Requires="a14">
             <p:sp>
               <p:nvSpPr>
                 <p:cNvPr id="36" name="Rounded Rectangle 35">
@@ -17770,7 +17626,7 @@
               </p:txBody>
             </p:sp>
           </mc:Choice>
-          <mc:Fallback>
+          <mc:Fallback xmlns="">
             <p:sp>
               <p:nvSpPr>
                 <p:cNvPr id="36" name="Rounded Rectangle 35">
@@ -17835,8 +17691,8 @@
               <a:chExt cx="2029431" cy="2018708"/>
             </a:xfrm>
           </p:grpSpPr>
-          <mc:AlternateContent xmlns:mc="http://schemas.openxmlformats.org/markup-compatibility/2006">
-            <mc:Choice xmlns:a14="http://schemas.microsoft.com/office/drawing/2010/main" Requires="a14">
+          <mc:AlternateContent xmlns:mc="http://schemas.openxmlformats.org/markup-compatibility/2006" xmlns:a14="http://schemas.microsoft.com/office/drawing/2010/main">
+            <mc:Choice Requires="a14">
               <p:sp>
                 <p:nvSpPr>
                   <p:cNvPr id="61" name="TextBox 60">
@@ -17892,7 +17748,7 @@
                 </p:txBody>
               </p:sp>
             </mc:Choice>
-            <mc:Fallback>
+            <mc:Fallback xmlns="">
               <p:sp>
                 <p:nvSpPr>
                   <p:cNvPr id="61" name="TextBox 60">
@@ -18064,8 +17920,8 @@
             <a:chExt cx="3454828" cy="2023135"/>
           </a:xfrm>
         </p:grpSpPr>
-        <mc:AlternateContent xmlns:mc="http://schemas.openxmlformats.org/markup-compatibility/2006">
-          <mc:Choice xmlns:a14="http://schemas.microsoft.com/office/drawing/2010/main" Requires="a14">
+        <mc:AlternateContent xmlns:mc="http://schemas.openxmlformats.org/markup-compatibility/2006" xmlns:a14="http://schemas.microsoft.com/office/drawing/2010/main">
+          <mc:Choice Requires="a14">
             <p:sp>
               <p:nvSpPr>
                 <p:cNvPr id="66" name="TextBox 65">
@@ -18151,7 +18007,7 @@
               </p:txBody>
             </p:sp>
           </mc:Choice>
-          <mc:Fallback>
+          <mc:Fallback xmlns="">
             <p:sp>
               <p:nvSpPr>
                 <p:cNvPr id="66" name="TextBox 65">
@@ -18309,8 +18165,8 @@
             </p:txBody>
           </p:sp>
         </p:grpSp>
-        <mc:AlternateContent xmlns:mc="http://schemas.openxmlformats.org/markup-compatibility/2006">
-          <mc:Choice xmlns:a14="http://schemas.microsoft.com/office/drawing/2010/main" Requires="a14">
+        <mc:AlternateContent xmlns:mc="http://schemas.openxmlformats.org/markup-compatibility/2006" xmlns:a14="http://schemas.microsoft.com/office/drawing/2010/main">
+          <mc:Choice Requires="a14">
             <p:sp>
               <p:nvSpPr>
                 <p:cNvPr id="68" name="TextBox 67">
@@ -18360,7 +18216,7 @@
               </p:txBody>
             </p:sp>
           </mc:Choice>
-          <mc:Fallback>
+          <mc:Fallback xmlns="">
             <p:sp>
               <p:nvSpPr>
                 <p:cNvPr id="68" name="TextBox 67">
@@ -18736,8 +18592,8 @@
           </a:p>
         </p:txBody>
       </p:sp>
-      <mc:AlternateContent xmlns:mc="http://schemas.openxmlformats.org/markup-compatibility/2006">
-        <mc:Choice xmlns:a14="http://schemas.microsoft.com/office/drawing/2010/main" Requires="a14">
+      <mc:AlternateContent xmlns:mc="http://schemas.openxmlformats.org/markup-compatibility/2006" xmlns:a14="http://schemas.microsoft.com/office/drawing/2010/main">
+        <mc:Choice Requires="a14">
           <p:sp>
             <p:nvSpPr>
               <p:cNvPr id="3" name="Content Placeholder 2">
@@ -18992,7 +18848,7 @@
             </p:txBody>
           </p:sp>
         </mc:Choice>
-        <mc:Fallback>
+        <mc:Fallback xmlns="">
           <p:sp>
             <p:nvSpPr>
               <p:cNvPr id="3" name="Content Placeholder 2">
@@ -19432,8 +19288,8 @@
           </mc:Fallback>
         </mc:AlternateContent>
       </p:grpSp>
-      <mc:AlternateContent xmlns:mc="http://schemas.openxmlformats.org/markup-compatibility/2006">
-        <mc:Choice xmlns:a14="http://schemas.microsoft.com/office/drawing/2010/main" Requires="a14">
+      <mc:AlternateContent xmlns:mc="http://schemas.openxmlformats.org/markup-compatibility/2006" xmlns:a14="http://schemas.microsoft.com/office/drawing/2010/main">
+        <mc:Choice Requires="a14">
           <p:sp>
             <p:nvSpPr>
               <p:cNvPr id="18" name="TextBox 17">
@@ -19587,7 +19443,7 @@
             </p:txBody>
           </p:sp>
         </mc:Choice>
-        <mc:Fallback>
+        <mc:Fallback xmlns="">
           <p:sp>
             <p:nvSpPr>
               <p:cNvPr id="18" name="TextBox 17">
@@ -19761,8 +19617,8 @@
             <a:chExt cx="2029431" cy="2018708"/>
           </a:xfrm>
         </p:grpSpPr>
-        <mc:AlternateContent xmlns:mc="http://schemas.openxmlformats.org/markup-compatibility/2006">
-          <mc:Choice xmlns:a14="http://schemas.microsoft.com/office/drawing/2010/main" Requires="a14">
+        <mc:AlternateContent xmlns:mc="http://schemas.openxmlformats.org/markup-compatibility/2006" xmlns:a14="http://schemas.microsoft.com/office/drawing/2010/main">
+          <mc:Choice Requires="a14">
             <p:sp>
               <p:nvSpPr>
                 <p:cNvPr id="35" name="TextBox 34">
@@ -19818,7 +19674,7 @@
               </p:txBody>
             </p:sp>
           </mc:Choice>
-          <mc:Fallback>
+          <mc:Fallback xmlns="">
             <p:sp>
               <p:nvSpPr>
                 <p:cNvPr id="35" name="TextBox 34">
@@ -19969,8 +19825,8 @@
           </p:cxnSp>
         </p:grpSp>
       </p:grpSp>
-      <mc:AlternateContent xmlns:mc="http://schemas.openxmlformats.org/markup-compatibility/2006">
-        <mc:Choice xmlns:a14="http://schemas.microsoft.com/office/drawing/2010/main" Requires="a14">
+      <mc:AlternateContent xmlns:mc="http://schemas.openxmlformats.org/markup-compatibility/2006" xmlns:a14="http://schemas.microsoft.com/office/drawing/2010/main">
+        <mc:Choice Requires="a14">
           <p:sp>
             <p:nvSpPr>
               <p:cNvPr id="9" name="TextBox 8">
@@ -20021,7 +19877,7 @@
             </p:txBody>
           </p:sp>
         </mc:Choice>
-        <mc:Fallback>
+        <mc:Fallback xmlns="">
           <p:sp>
             <p:nvSpPr>
               <p:cNvPr id="9" name="TextBox 8">
@@ -20086,8 +19942,8 @@
             <a:chExt cx="4266626" cy="2430294"/>
           </a:xfrm>
         </p:grpSpPr>
-        <mc:AlternateContent xmlns:mc="http://schemas.openxmlformats.org/markup-compatibility/2006">
-          <mc:Choice xmlns:a14="http://schemas.microsoft.com/office/drawing/2010/main" Requires="a14">
+        <mc:AlternateContent xmlns:mc="http://schemas.openxmlformats.org/markup-compatibility/2006" xmlns:a14="http://schemas.microsoft.com/office/drawing/2010/main">
+          <mc:Choice Requires="a14">
             <p:sp>
               <p:nvSpPr>
                 <p:cNvPr id="4" name="TextBox 3">
@@ -20253,7 +20109,7 @@
               </p:txBody>
             </p:sp>
           </mc:Choice>
-          <mc:Fallback>
+          <mc:Fallback xmlns="">
             <p:sp>
               <p:nvSpPr>
                 <p:cNvPr id="4" name="TextBox 3">
@@ -20430,8 +20286,8 @@
             <a:chExt cx="3454828" cy="2023135"/>
           </a:xfrm>
         </p:grpSpPr>
-        <mc:AlternateContent xmlns:mc="http://schemas.openxmlformats.org/markup-compatibility/2006">
-          <mc:Choice xmlns:a14="http://schemas.microsoft.com/office/drawing/2010/main" Requires="a14">
+        <mc:AlternateContent xmlns:mc="http://schemas.openxmlformats.org/markup-compatibility/2006" xmlns:a14="http://schemas.microsoft.com/office/drawing/2010/main">
+          <mc:Choice Requires="a14">
             <p:sp>
               <p:nvSpPr>
                 <p:cNvPr id="30" name="TextBox 29">
@@ -20517,7 +20373,7 @@
               </p:txBody>
             </p:sp>
           </mc:Choice>
-          <mc:Fallback>
+          <mc:Fallback xmlns="">
             <p:sp>
               <p:nvSpPr>
                 <p:cNvPr id="30" name="TextBox 29">
@@ -20675,8 +20531,8 @@
             </p:txBody>
           </p:sp>
         </p:grpSp>
-        <mc:AlternateContent xmlns:mc="http://schemas.openxmlformats.org/markup-compatibility/2006">
-          <mc:Choice xmlns:a14="http://schemas.microsoft.com/office/drawing/2010/main" Requires="a14">
+        <mc:AlternateContent xmlns:mc="http://schemas.openxmlformats.org/markup-compatibility/2006" xmlns:a14="http://schemas.microsoft.com/office/drawing/2010/main">
+          <mc:Choice Requires="a14">
             <p:sp>
               <p:nvSpPr>
                 <p:cNvPr id="14" name="TextBox 13">
@@ -20726,7 +20582,7 @@
               </p:txBody>
             </p:sp>
           </mc:Choice>
-          <mc:Fallback>
+          <mc:Fallback xmlns="">
             <p:sp>
               <p:nvSpPr>
                 <p:cNvPr id="14" name="TextBox 13">
@@ -20792,8 +20648,8 @@
             <a:chExt cx="8914312" cy="2811656"/>
           </a:xfrm>
         </p:grpSpPr>
-        <mc:AlternateContent xmlns:mc="http://schemas.openxmlformats.org/markup-compatibility/2006">
-          <mc:Choice xmlns:a14="http://schemas.microsoft.com/office/drawing/2010/main" Requires="a14">
+        <mc:AlternateContent xmlns:mc="http://schemas.openxmlformats.org/markup-compatibility/2006" xmlns:a14="http://schemas.microsoft.com/office/drawing/2010/main">
+          <mc:Choice Requires="a14">
             <p:sp>
               <p:nvSpPr>
                 <p:cNvPr id="21" name="TextBox 20">
@@ -20890,7 +20746,7 @@
               </p:txBody>
             </p:sp>
           </mc:Choice>
-          <mc:Fallback>
+          <mc:Fallback xmlns="">
             <p:sp>
               <p:nvSpPr>
                 <p:cNvPr id="21" name="TextBox 20">
@@ -21235,2187 +21091,6 @@
 </file>
 
 <file path=ppt/slides/slide25.xml><?xml version="1.0" encoding="utf-8"?>
-<p:sld xmlns:a="http://schemas.openxmlformats.org/drawingml/2006/main" xmlns:r="http://schemas.openxmlformats.org/officeDocument/2006/relationships" xmlns:p="http://schemas.openxmlformats.org/presentationml/2006/main" show="0">
-  <p:cSld>
-    <p:spTree>
-      <p:nvGrpSpPr>
-        <p:cNvPr id="1" name="">
-          <a:extLst>
-            <a:ext uri="{FF2B5EF4-FFF2-40B4-BE49-F238E27FC236}">
-              <a16:creationId xmlns:a16="http://schemas.microsoft.com/office/drawing/2014/main" id="{E9D786DC-7DCC-2785-0F0C-ED961BF47D4A}"/>
-            </a:ext>
-          </a:extLst>
-        </p:cNvPr>
-        <p:cNvGrpSpPr/>
-        <p:nvPr/>
-      </p:nvGrpSpPr>
-      <p:grpSpPr>
-        <a:xfrm>
-          <a:off x="0" y="0"/>
-          <a:ext cx="0" cy="0"/>
-          <a:chOff x="0" y="0"/>
-          <a:chExt cx="0" cy="0"/>
-        </a:xfrm>
-      </p:grpSpPr>
-      <p:sp>
-        <p:nvSpPr>
-          <p:cNvPr id="2" name="Title 1">
-            <a:extLst>
-              <a:ext uri="{FF2B5EF4-FFF2-40B4-BE49-F238E27FC236}">
-                <a16:creationId xmlns:a16="http://schemas.microsoft.com/office/drawing/2014/main" id="{C7A31281-7F7F-6F65-4237-ACC9CE9CCB7F}"/>
-              </a:ext>
-            </a:extLst>
-          </p:cNvPr>
-          <p:cNvSpPr>
-            <a:spLocks noGrp="1"/>
-          </p:cNvSpPr>
-          <p:nvPr>
-            <p:ph type="title"/>
-          </p:nvPr>
-        </p:nvSpPr>
-        <p:spPr/>
-        <p:txBody>
-          <a:bodyPr/>
-          <a:lstStyle/>
-          <a:p>
-            <a:r>
-              <a:rPr lang="en-US" dirty="0"/>
-              <a:t>PIH: The Math (Part 2)</a:t>
-            </a:r>
-          </a:p>
-        </p:txBody>
-      </p:sp>
-      <mc:AlternateContent xmlns:mc="http://schemas.openxmlformats.org/markup-compatibility/2006" xmlns:a14="http://schemas.microsoft.com/office/drawing/2010/main">
-        <mc:Choice Requires="a14">
-          <p:sp>
-            <p:nvSpPr>
-              <p:cNvPr id="3" name="Content Placeholder 2">
-                <a:extLst>
-                  <a:ext uri="{FF2B5EF4-FFF2-40B4-BE49-F238E27FC236}">
-                    <a16:creationId xmlns:a16="http://schemas.microsoft.com/office/drawing/2014/main" id="{C7169E3D-19F9-B78E-6CE8-70F14AA05C4F}"/>
-                  </a:ext>
-                </a:extLst>
-              </p:cNvPr>
-              <p:cNvSpPr>
-                <a:spLocks noGrp="1"/>
-              </p:cNvSpPr>
-              <p:nvPr>
-                <p:ph idx="1"/>
-              </p:nvPr>
-            </p:nvSpPr>
-            <p:spPr>
-              <a:xfrm>
-                <a:off x="823674" y="1592521"/>
-                <a:ext cx="10515600" cy="4351338"/>
-              </a:xfrm>
-            </p:spPr>
-            <p:txBody>
-              <a:bodyPr/>
-              <a:lstStyle/>
-              <a:p>
-                <a14:m>
-                  <m:oMath xmlns:m="http://schemas.openxmlformats.org/officeDocument/2006/math">
-                    <m:r>
-                      <a:rPr lang="en-US" b="0" i="1" smtClean="0">
-                        <a:latin typeface="Cambria Math" panose="02040503050406030204" pitchFamily="18" charset="0"/>
-                      </a:rPr>
-                      <m:t>𝑉</m:t>
-                    </m:r>
-                    <m:r>
-                      <a:rPr lang="en-US" b="0" i="1" smtClean="0">
-                        <a:latin typeface="Cambria Math" panose="02040503050406030204" pitchFamily="18" charset="0"/>
-                      </a:rPr>
-                      <m:t>(</m:t>
-                    </m:r>
-                    <m:sSub>
-                      <m:sSubPr>
-                        <m:ctrlPr>
-                          <a:rPr lang="en-US" b="0" i="1" smtClean="0">
-                            <a:latin typeface="Cambria Math" panose="02040503050406030204" pitchFamily="18" charset="0"/>
-                          </a:rPr>
-                        </m:ctrlPr>
-                      </m:sSubPr>
-                      <m:e>
-                        <m:r>
-                          <a:rPr lang="en-US" b="0" i="1" smtClean="0">
-                            <a:latin typeface="Cambria Math" panose="02040503050406030204" pitchFamily="18" charset="0"/>
-                          </a:rPr>
-                          <m:t>𝐴</m:t>
-                        </m:r>
-                      </m:e>
-                      <m:sub>
-                        <m:r>
-                          <a:rPr lang="en-US" b="0" i="1" smtClean="0">
-                            <a:latin typeface="Cambria Math" panose="02040503050406030204" pitchFamily="18" charset="0"/>
-                          </a:rPr>
-                          <m:t>𝑡</m:t>
-                        </m:r>
-                      </m:sub>
-                    </m:sSub>
-                    <m:r>
-                      <a:rPr lang="en-US" b="0" i="1" smtClean="0">
-                        <a:latin typeface="Cambria Math" panose="02040503050406030204" pitchFamily="18" charset="0"/>
-                      </a:rPr>
-                      <m:t>, </m:t>
-                    </m:r>
-                    <m:sSub>
-                      <m:sSubPr>
-                        <m:ctrlPr>
-                          <a:rPr lang="en-US" b="0" i="1" smtClean="0">
-                            <a:latin typeface="Cambria Math" panose="02040503050406030204" pitchFamily="18" charset="0"/>
-                          </a:rPr>
-                        </m:ctrlPr>
-                      </m:sSubPr>
-                      <m:e>
-                        <m:r>
-                          <a:rPr lang="en-US" b="0" i="1" smtClean="0">
-                            <a:latin typeface="Cambria Math" panose="02040503050406030204" pitchFamily="18" charset="0"/>
-                          </a:rPr>
-                          <m:t>𝑐</m:t>
-                        </m:r>
-                      </m:e>
-                      <m:sub>
-                        <m:r>
-                          <a:rPr lang="en-US" b="0" i="1" smtClean="0">
-                            <a:latin typeface="Cambria Math" panose="02040503050406030204" pitchFamily="18" charset="0"/>
-                          </a:rPr>
-                          <m:t>𝑡</m:t>
-                        </m:r>
-                      </m:sub>
-                    </m:sSub>
-                    <m:r>
-                      <a:rPr lang="en-US" b="0" i="1" smtClean="0">
-                        <a:latin typeface="Cambria Math" panose="02040503050406030204" pitchFamily="18" charset="0"/>
-                      </a:rPr>
-                      <m:t>, </m:t>
-                    </m:r>
-                    <m:sSub>
-                      <m:sSubPr>
-                        <m:ctrlPr>
-                          <a:rPr lang="en-US" b="0" i="1" smtClean="0">
-                            <a:latin typeface="Cambria Math" panose="02040503050406030204" pitchFamily="18" charset="0"/>
-                          </a:rPr>
-                        </m:ctrlPr>
-                      </m:sSubPr>
-                      <m:e>
-                        <m:r>
-                          <a:rPr lang="en-US" b="0" i="1" smtClean="0">
-                            <a:latin typeface="Cambria Math" panose="02040503050406030204" pitchFamily="18" charset="0"/>
-                          </a:rPr>
-                          <m:t>𝑦</m:t>
-                        </m:r>
-                      </m:e>
-                      <m:sub>
-                        <m:r>
-                          <a:rPr lang="en-US" b="0" i="1" smtClean="0">
-                            <a:latin typeface="Cambria Math" panose="02040503050406030204" pitchFamily="18" charset="0"/>
-                          </a:rPr>
-                          <m:t>𝑡</m:t>
-                        </m:r>
-                      </m:sub>
-                    </m:sSub>
-                    <m:r>
-                      <a:rPr lang="en-US" b="0" i="1" smtClean="0">
-                        <a:latin typeface="Cambria Math" panose="02040503050406030204" pitchFamily="18" charset="0"/>
-                      </a:rPr>
-                      <m:t>)</m:t>
-                    </m:r>
-                  </m:oMath>
-                </a14:m>
-                <a:r>
-                  <a:rPr lang="en-US" dirty="0"/>
-                  <a:t> is how much I value the situation “</a:t>
-                </a:r>
-                <a14:m>
-                  <m:oMath xmlns:m="http://schemas.openxmlformats.org/officeDocument/2006/math">
-                    <m:sSub>
-                      <m:sSubPr>
-                        <m:ctrlPr>
-                          <a:rPr lang="en-US" i="1">
-                            <a:latin typeface="Cambria Math" panose="02040503050406030204" pitchFamily="18" charset="0"/>
-                          </a:rPr>
-                        </m:ctrlPr>
-                      </m:sSubPr>
-                      <m:e>
-                        <m:r>
-                          <a:rPr lang="en-US" i="1">
-                            <a:latin typeface="Cambria Math" panose="02040503050406030204" pitchFamily="18" charset="0"/>
-                          </a:rPr>
-                          <m:t>𝐴</m:t>
-                        </m:r>
-                      </m:e>
-                      <m:sub>
-                        <m:r>
-                          <a:rPr lang="en-US" i="1">
-                            <a:latin typeface="Cambria Math" panose="02040503050406030204" pitchFamily="18" charset="0"/>
-                          </a:rPr>
-                          <m:t>𝑡</m:t>
-                        </m:r>
-                      </m:sub>
-                    </m:sSub>
-                    <m:r>
-                      <a:rPr lang="en-US" i="1">
-                        <a:latin typeface="Cambria Math" panose="02040503050406030204" pitchFamily="18" charset="0"/>
-                      </a:rPr>
-                      <m:t>, </m:t>
-                    </m:r>
-                    <m:sSub>
-                      <m:sSubPr>
-                        <m:ctrlPr>
-                          <a:rPr lang="en-US" i="1">
-                            <a:latin typeface="Cambria Math" panose="02040503050406030204" pitchFamily="18" charset="0"/>
-                          </a:rPr>
-                        </m:ctrlPr>
-                      </m:sSubPr>
-                      <m:e>
-                        <m:r>
-                          <a:rPr lang="en-US" i="1">
-                            <a:latin typeface="Cambria Math" panose="02040503050406030204" pitchFamily="18" charset="0"/>
-                          </a:rPr>
-                          <m:t>𝑐</m:t>
-                        </m:r>
-                      </m:e>
-                      <m:sub>
-                        <m:r>
-                          <a:rPr lang="en-US" i="1">
-                            <a:latin typeface="Cambria Math" panose="02040503050406030204" pitchFamily="18" charset="0"/>
-                          </a:rPr>
-                          <m:t>𝑡</m:t>
-                        </m:r>
-                      </m:sub>
-                    </m:sSub>
-                    <m:r>
-                      <a:rPr lang="en-US" i="1">
-                        <a:latin typeface="Cambria Math" panose="02040503050406030204" pitchFamily="18" charset="0"/>
-                      </a:rPr>
-                      <m:t>, </m:t>
-                    </m:r>
-                    <m:sSub>
-                      <m:sSubPr>
-                        <m:ctrlPr>
-                          <a:rPr lang="en-US" i="1">
-                            <a:latin typeface="Cambria Math" panose="02040503050406030204" pitchFamily="18" charset="0"/>
-                          </a:rPr>
-                        </m:ctrlPr>
-                      </m:sSubPr>
-                      <m:e>
-                        <m:r>
-                          <a:rPr lang="en-US" i="1">
-                            <a:latin typeface="Cambria Math" panose="02040503050406030204" pitchFamily="18" charset="0"/>
-                          </a:rPr>
-                          <m:t>𝑦</m:t>
-                        </m:r>
-                      </m:e>
-                      <m:sub>
-                        <m:r>
-                          <a:rPr lang="en-US" i="1">
-                            <a:latin typeface="Cambria Math" panose="02040503050406030204" pitchFamily="18" charset="0"/>
-                          </a:rPr>
-                          <m:t>𝑡</m:t>
-                        </m:r>
-                      </m:sub>
-                    </m:sSub>
-                  </m:oMath>
-                </a14:m>
-                <a:r>
-                  <a:rPr lang="en-US" dirty="0"/>
-                  <a:t>”, assuming I make optimal decisions going forward.</a:t>
-                </a:r>
-              </a:p>
-              <a:p>
-                <a:r>
-                  <a:rPr lang="en-US" dirty="0"/>
-                  <a:t>Then:</a:t>
-                </a:r>
-              </a:p>
-              <a:p>
-                <a:pPr lvl="1"/>
-                <a:endParaRPr lang="en-US" dirty="0"/>
-              </a:p>
-              <a:p>
-                <a:pPr marL="0" indent="0">
-                  <a:buNone/>
-                </a:pPr>
-                <a:endParaRPr lang="en-US" dirty="0"/>
-              </a:p>
-            </p:txBody>
-          </p:sp>
-        </mc:Choice>
-        <mc:Fallback xmlns="">
-          <p:sp>
-            <p:nvSpPr>
-              <p:cNvPr id="3" name="Content Placeholder 2">
-                <a:extLst>
-                  <a:ext uri="{FF2B5EF4-FFF2-40B4-BE49-F238E27FC236}">
-                    <a16:creationId xmlns:a16="http://schemas.microsoft.com/office/drawing/2014/main" id="{744BDBC2-53BA-EAA1-FB5F-F817646B163F}"/>
-                  </a:ext>
-                </a:extLst>
-              </p:cNvPr>
-              <p:cNvSpPr>
-                <a:spLocks noGrp="1" noRot="1" noChangeAspect="1" noMove="1" noResize="1" noEditPoints="1" noAdjustHandles="1" noChangeArrowheads="1" noChangeShapeType="1" noTextEdit="1"/>
-              </p:cNvSpPr>
-              <p:nvPr>
-                <p:ph idx="1"/>
-              </p:nvPr>
-            </p:nvSpPr>
-            <p:spPr>
-              <a:xfrm>
-                <a:off x="823674" y="1592521"/>
-                <a:ext cx="10515600" cy="4351338"/>
-              </a:xfrm>
-              <a:blipFill>
-                <a:blip r:embed="rId3"/>
-                <a:stretch>
-                  <a:fillRect l="-965" t="-2326"/>
-                </a:stretch>
-              </a:blipFill>
-            </p:spPr>
-            <p:txBody>
-              <a:bodyPr/>
-              <a:lstStyle/>
-              <a:p>
-                <a:r>
-                  <a:rPr lang="en-US">
-                    <a:noFill/>
-                  </a:rPr>
-                  <a:t> </a:t>
-                </a:r>
-              </a:p>
-            </p:txBody>
-          </p:sp>
-        </mc:Fallback>
-      </mc:AlternateContent>
-      <mc:AlternateContent xmlns:mc="http://schemas.openxmlformats.org/markup-compatibility/2006">
-        <mc:Choice xmlns:a14="http://schemas.microsoft.com/office/drawing/2010/main" Requires="a14">
-          <p:sp>
-            <p:nvSpPr>
-              <p:cNvPr id="8" name="TextBox 7">
-                <a:extLst>
-                  <a:ext uri="{FF2B5EF4-FFF2-40B4-BE49-F238E27FC236}">
-                    <a16:creationId xmlns:a16="http://schemas.microsoft.com/office/drawing/2014/main" id="{B161081C-AF9C-EAB5-5874-8B3C546FF504}"/>
-                  </a:ext>
-                </a:extLst>
-              </p:cNvPr>
-              <p:cNvSpPr txBox="1"/>
-              <p:nvPr/>
-            </p:nvSpPr>
-            <p:spPr>
-              <a:xfrm>
-                <a:off x="719382" y="4328901"/>
-                <a:ext cx="11353799" cy="954172"/>
-              </a:xfrm>
-              <a:prstGeom prst="rect">
-                <a:avLst/>
-              </a:prstGeom>
-              <a:noFill/>
-            </p:spPr>
-            <p:txBody>
-              <a:bodyPr wrap="square">
-                <a:spAutoFit/>
-              </a:bodyPr>
-              <a:lstStyle/>
-              <a:p>
-                <a:pPr/>
-                <a14:m>
-                  <m:oMathPara xmlns:m="http://schemas.openxmlformats.org/officeDocument/2006/math">
-                    <m:oMathParaPr>
-                      <m:jc m:val="centerGroup"/>
-                    </m:oMathParaPr>
-                    <m:oMath xmlns:m="http://schemas.openxmlformats.org/officeDocument/2006/math">
-                      <m:r>
-                        <a:rPr lang="en-US" sz="3900" b="0" i="1" smtClean="0">
-                          <a:latin typeface="Cambria Math" panose="02040503050406030204" pitchFamily="18" charset="0"/>
-                        </a:rPr>
-                        <m:t>𝑉</m:t>
-                      </m:r>
-                      <m:d>
-                        <m:dPr>
-                          <m:ctrlPr>
-                            <a:rPr lang="en-US" sz="3900" b="0" i="1" smtClean="0">
-                              <a:latin typeface="Cambria Math" panose="02040503050406030204" pitchFamily="18" charset="0"/>
-                            </a:rPr>
-                          </m:ctrlPr>
-                        </m:dPr>
-                        <m:e>
-                          <m:sSub>
-                            <m:sSubPr>
-                              <m:ctrlPr>
-                                <a:rPr lang="en-US" sz="3900" b="0" i="1" smtClean="0">
-                                  <a:latin typeface="Cambria Math" panose="02040503050406030204" pitchFamily="18" charset="0"/>
-                                </a:rPr>
-                              </m:ctrlPr>
-                            </m:sSubPr>
-                            <m:e>
-                              <m:r>
-                                <a:rPr lang="en-US" sz="3900" b="0" i="1" smtClean="0">
-                                  <a:latin typeface="Cambria Math" panose="02040503050406030204" pitchFamily="18" charset="0"/>
-                                </a:rPr>
-                                <m:t>𝐴</m:t>
-                              </m:r>
-                            </m:e>
-                            <m:sub>
-                              <m:r>
-                                <a:rPr lang="en-US" sz="3900" b="0" i="1" smtClean="0">
-                                  <a:latin typeface="Cambria Math" panose="02040503050406030204" pitchFamily="18" charset="0"/>
-                                </a:rPr>
-                                <m:t>𝑡</m:t>
-                              </m:r>
-                            </m:sub>
-                          </m:sSub>
-                          <m:r>
-                            <a:rPr lang="en-US" sz="3900" b="0" i="1" smtClean="0">
-                              <a:latin typeface="Cambria Math" panose="02040503050406030204" pitchFamily="18" charset="0"/>
-                            </a:rPr>
-                            <m:t>, </m:t>
-                          </m:r>
-                          <m:sSub>
-                            <m:sSubPr>
-                              <m:ctrlPr>
-                                <a:rPr lang="en-US" sz="3900" b="0" i="1" smtClean="0">
-                                  <a:latin typeface="Cambria Math" panose="02040503050406030204" pitchFamily="18" charset="0"/>
-                                </a:rPr>
-                              </m:ctrlPr>
-                            </m:sSubPr>
-                            <m:e>
-                              <m:r>
-                                <a:rPr lang="en-US" sz="3900" b="0" i="1" smtClean="0">
-                                  <a:latin typeface="Cambria Math" panose="02040503050406030204" pitchFamily="18" charset="0"/>
-                                </a:rPr>
-                                <m:t>𝑐</m:t>
-                              </m:r>
-                            </m:e>
-                            <m:sub>
-                              <m:r>
-                                <a:rPr lang="en-US" sz="3900" b="0" i="1" smtClean="0">
-                                  <a:latin typeface="Cambria Math" panose="02040503050406030204" pitchFamily="18" charset="0"/>
-                                </a:rPr>
-                                <m:t>𝑡</m:t>
-                              </m:r>
-                            </m:sub>
-                          </m:sSub>
-                          <m:r>
-                            <a:rPr lang="en-US" sz="3900" b="0" i="1" smtClean="0">
-                              <a:latin typeface="Cambria Math" panose="02040503050406030204" pitchFamily="18" charset="0"/>
-                            </a:rPr>
-                            <m:t>, </m:t>
-                          </m:r>
-                          <m:sSub>
-                            <m:sSubPr>
-                              <m:ctrlPr>
-                                <a:rPr lang="en-US" sz="3900" b="0" i="1" smtClean="0">
-                                  <a:latin typeface="Cambria Math" panose="02040503050406030204" pitchFamily="18" charset="0"/>
-                                </a:rPr>
-                              </m:ctrlPr>
-                            </m:sSubPr>
-                            <m:e>
-                              <m:r>
-                                <a:rPr lang="en-US" sz="3900" b="0" i="1" smtClean="0">
-                                  <a:latin typeface="Cambria Math" panose="02040503050406030204" pitchFamily="18" charset="0"/>
-                                </a:rPr>
-                                <m:t>𝑦</m:t>
-                              </m:r>
-                            </m:e>
-                            <m:sub>
-                              <m:r>
-                                <a:rPr lang="en-US" sz="3900" b="0" i="1" smtClean="0">
-                                  <a:latin typeface="Cambria Math" panose="02040503050406030204" pitchFamily="18" charset="0"/>
-                                </a:rPr>
-                                <m:t>𝑡</m:t>
-                              </m:r>
-                            </m:sub>
-                          </m:sSub>
-                        </m:e>
-                      </m:d>
-                      <m:r>
-                        <a:rPr lang="en-US" sz="3900" b="0" i="1" smtClean="0">
-                          <a:latin typeface="Cambria Math" panose="02040503050406030204" pitchFamily="18" charset="0"/>
-                        </a:rPr>
-                        <m:t>=</m:t>
-                      </m:r>
-                      <m:func>
-                        <m:funcPr>
-                          <m:ctrlPr>
-                            <a:rPr lang="en-US" sz="3900" b="0" i="1" smtClean="0">
-                              <a:latin typeface="Cambria Math" panose="02040503050406030204" pitchFamily="18" charset="0"/>
-                            </a:rPr>
-                          </m:ctrlPr>
-                        </m:funcPr>
-                        <m:fName>
-                          <m:limLow>
-                            <m:limLowPr>
-                              <m:ctrlPr>
-                                <a:rPr lang="en-US" sz="3900" b="0" i="1" smtClean="0">
-                                  <a:latin typeface="Cambria Math" panose="02040503050406030204" pitchFamily="18" charset="0"/>
-                                </a:rPr>
-                              </m:ctrlPr>
-                            </m:limLowPr>
-                            <m:e>
-                              <m:r>
-                                <m:rPr>
-                                  <m:sty m:val="p"/>
-                                </m:rPr>
-                                <a:rPr lang="en-US" sz="3900" b="0" i="0" smtClean="0">
-                                  <a:latin typeface="Cambria Math" panose="02040503050406030204" pitchFamily="18" charset="0"/>
-                                </a:rPr>
-                                <m:t>max</m:t>
-                              </m:r>
-                            </m:e>
-                            <m:lim>
-                              <m:sSub>
-                                <m:sSubPr>
-                                  <m:ctrlPr>
-                                    <a:rPr lang="en-US" sz="3900" b="0" i="1" smtClean="0">
-                                      <a:latin typeface="Cambria Math" panose="02040503050406030204" pitchFamily="18" charset="0"/>
-                                    </a:rPr>
-                                  </m:ctrlPr>
-                                </m:sSubPr>
-                                <m:e>
-                                  <m:r>
-                                    <a:rPr lang="en-US" sz="3900" b="0" i="1" smtClean="0">
-                                      <a:latin typeface="Cambria Math" panose="02040503050406030204" pitchFamily="18" charset="0"/>
-                                    </a:rPr>
-                                    <m:t>𝑐</m:t>
-                                  </m:r>
-                                </m:e>
-                                <m:sub>
-                                  <m:r>
-                                    <a:rPr lang="en-US" sz="3900" b="0" i="1" smtClean="0">
-                                      <a:latin typeface="Cambria Math" panose="02040503050406030204" pitchFamily="18" charset="0"/>
-                                    </a:rPr>
-                                    <m:t>𝑡</m:t>
-                                  </m:r>
-                                  <m:r>
-                                    <a:rPr lang="en-US" sz="3900" b="0" i="1" smtClean="0">
-                                      <a:latin typeface="Cambria Math" panose="02040503050406030204" pitchFamily="18" charset="0"/>
-                                    </a:rPr>
-                                    <m:t>+1</m:t>
-                                  </m:r>
-                                </m:sub>
-                              </m:sSub>
-                            </m:lim>
-                          </m:limLow>
-                        </m:fName>
-                        <m:e>
-                          <m:d>
-                            <m:dPr>
-                              <m:begChr m:val="["/>
-                              <m:endChr m:val="]"/>
-                              <m:ctrlPr>
-                                <a:rPr lang="en-US" sz="3900" b="0" i="1" smtClean="0">
-                                  <a:latin typeface="Cambria Math" panose="02040503050406030204" pitchFamily="18" charset="0"/>
-                                </a:rPr>
-                              </m:ctrlPr>
-                            </m:dPr>
-                            <m:e>
-                              <m:r>
-                                <a:rPr lang="en-US" sz="3900" b="0" i="1" smtClean="0">
-                                  <a:latin typeface="Cambria Math" panose="02040503050406030204" pitchFamily="18" charset="0"/>
-                                </a:rPr>
-                                <m:t>𝑢</m:t>
-                              </m:r>
-                              <m:d>
-                                <m:dPr>
-                                  <m:ctrlPr>
-                                    <a:rPr lang="en-US" sz="3900" b="0" i="1" smtClean="0">
-                                      <a:latin typeface="Cambria Math" panose="02040503050406030204" pitchFamily="18" charset="0"/>
-                                    </a:rPr>
-                                  </m:ctrlPr>
-                                </m:dPr>
-                                <m:e>
-                                  <m:sSub>
-                                    <m:sSubPr>
-                                      <m:ctrlPr>
-                                        <a:rPr lang="en-US" sz="3900" b="0" i="1" smtClean="0">
-                                          <a:latin typeface="Cambria Math" panose="02040503050406030204" pitchFamily="18" charset="0"/>
-                                        </a:rPr>
-                                      </m:ctrlPr>
-                                    </m:sSubPr>
-                                    <m:e>
-                                      <m:r>
-                                        <a:rPr lang="en-US" sz="3900" b="0" i="1" smtClean="0">
-                                          <a:latin typeface="Cambria Math" panose="02040503050406030204" pitchFamily="18" charset="0"/>
-                                        </a:rPr>
-                                        <m:t>𝑐</m:t>
-                                      </m:r>
-                                    </m:e>
-                                    <m:sub>
-                                      <m:r>
-                                        <a:rPr lang="en-US" sz="3900" b="0" i="1" smtClean="0">
-                                          <a:latin typeface="Cambria Math" panose="02040503050406030204" pitchFamily="18" charset="0"/>
-                                        </a:rPr>
-                                        <m:t>𝑡</m:t>
-                                      </m:r>
-                                    </m:sub>
-                                  </m:sSub>
-                                </m:e>
-                              </m:d>
-                              <m:r>
-                                <a:rPr lang="en-US" sz="3900" b="0" i="1" smtClean="0">
-                                  <a:latin typeface="Cambria Math" panose="02040503050406030204" pitchFamily="18" charset="0"/>
-                                </a:rPr>
-                                <m:t>+</m:t>
-                              </m:r>
-                              <m:r>
-                                <a:rPr lang="en-US" sz="3900" b="0" i="1" smtClean="0">
-                                  <a:latin typeface="Cambria Math" panose="02040503050406030204" pitchFamily="18" charset="0"/>
-                                </a:rPr>
-                                <m:t>𝛽</m:t>
-                              </m:r>
-                              <m:r>
-                                <a:rPr lang="en-US" sz="3900" b="0" i="1" smtClean="0">
-                                  <a:latin typeface="Cambria Math" panose="02040503050406030204" pitchFamily="18" charset="0"/>
-                                </a:rPr>
-                                <m:t>⋅</m:t>
-                              </m:r>
-                              <m:r>
-                                <a:rPr lang="en-US" sz="3900" i="1">
-                                  <a:latin typeface="Cambria Math" panose="02040503050406030204" pitchFamily="18" charset="0"/>
-                                  <a:ea typeface="Cambria Math" panose="02040503050406030204" pitchFamily="18" charset="0"/>
-                                </a:rPr>
-                                <m:t>𝔼</m:t>
-                              </m:r>
-                              <m:r>
-                                <a:rPr lang="en-US" sz="3900" i="1">
-                                  <a:latin typeface="Cambria Math" panose="02040503050406030204" pitchFamily="18" charset="0"/>
-                                </a:rPr>
-                                <m:t>𝑉</m:t>
-                              </m:r>
-                              <m:d>
-                                <m:dPr>
-                                  <m:ctrlPr>
-                                    <a:rPr lang="en-US" sz="3900" i="1">
-                                      <a:latin typeface="Cambria Math" panose="02040503050406030204" pitchFamily="18" charset="0"/>
-                                    </a:rPr>
-                                  </m:ctrlPr>
-                                </m:dPr>
-                                <m:e>
-                                  <m:sSub>
-                                    <m:sSubPr>
-                                      <m:ctrlPr>
-                                        <a:rPr lang="en-US" sz="3900" i="1">
-                                          <a:latin typeface="Cambria Math" panose="02040503050406030204" pitchFamily="18" charset="0"/>
-                                        </a:rPr>
-                                      </m:ctrlPr>
-                                    </m:sSubPr>
-                                    <m:e>
-                                      <m:r>
-                                        <a:rPr lang="en-US" sz="3900" i="1">
-                                          <a:latin typeface="Cambria Math" panose="02040503050406030204" pitchFamily="18" charset="0"/>
-                                        </a:rPr>
-                                        <m:t>𝐴</m:t>
-                                      </m:r>
-                                    </m:e>
-                                    <m:sub>
-                                      <m:r>
-                                        <a:rPr lang="en-US" sz="3900" i="1">
-                                          <a:latin typeface="Cambria Math" panose="02040503050406030204" pitchFamily="18" charset="0"/>
-                                        </a:rPr>
-                                        <m:t>𝑡</m:t>
-                                      </m:r>
-                                      <m:r>
-                                        <a:rPr lang="en-US" sz="3900" i="1">
-                                          <a:latin typeface="Cambria Math" panose="02040503050406030204" pitchFamily="18" charset="0"/>
-                                        </a:rPr>
-                                        <m:t>+1</m:t>
-                                      </m:r>
-                                    </m:sub>
-                                  </m:sSub>
-                                  <m:r>
-                                    <a:rPr lang="en-US" sz="3900" i="1">
-                                      <a:latin typeface="Cambria Math" panose="02040503050406030204" pitchFamily="18" charset="0"/>
-                                    </a:rPr>
-                                    <m:t>, </m:t>
-                                  </m:r>
-                                  <m:sSub>
-                                    <m:sSubPr>
-                                      <m:ctrlPr>
-                                        <a:rPr lang="en-US" sz="3900" i="1">
-                                          <a:latin typeface="Cambria Math" panose="02040503050406030204" pitchFamily="18" charset="0"/>
-                                        </a:rPr>
-                                      </m:ctrlPr>
-                                    </m:sSubPr>
-                                    <m:e>
-                                      <m:r>
-                                        <a:rPr lang="en-US" sz="3900" i="1">
-                                          <a:latin typeface="Cambria Math" panose="02040503050406030204" pitchFamily="18" charset="0"/>
-                                        </a:rPr>
-                                        <m:t>𝑐</m:t>
-                                      </m:r>
-                                    </m:e>
-                                    <m:sub>
-                                      <m:r>
-                                        <a:rPr lang="en-US" sz="3900" i="1">
-                                          <a:latin typeface="Cambria Math" panose="02040503050406030204" pitchFamily="18" charset="0"/>
-                                        </a:rPr>
-                                        <m:t>𝑡</m:t>
-                                      </m:r>
-                                      <m:r>
-                                        <a:rPr lang="en-US" sz="3900" i="1">
-                                          <a:latin typeface="Cambria Math" panose="02040503050406030204" pitchFamily="18" charset="0"/>
-                                        </a:rPr>
-                                        <m:t>+1</m:t>
-                                      </m:r>
-                                    </m:sub>
-                                  </m:sSub>
-                                  <m:r>
-                                    <a:rPr lang="en-US" sz="3900" i="1">
-                                      <a:latin typeface="Cambria Math" panose="02040503050406030204" pitchFamily="18" charset="0"/>
-                                    </a:rPr>
-                                    <m:t>, </m:t>
-                                  </m:r>
-                                  <m:sSub>
-                                    <m:sSubPr>
-                                      <m:ctrlPr>
-                                        <a:rPr lang="en-US" sz="3900" i="1">
-                                          <a:latin typeface="Cambria Math" panose="02040503050406030204" pitchFamily="18" charset="0"/>
-                                        </a:rPr>
-                                      </m:ctrlPr>
-                                    </m:sSubPr>
-                                    <m:e>
-                                      <m:r>
-                                        <a:rPr lang="en-US" sz="3900" i="1">
-                                          <a:latin typeface="Cambria Math" panose="02040503050406030204" pitchFamily="18" charset="0"/>
-                                        </a:rPr>
-                                        <m:t>𝑦</m:t>
-                                      </m:r>
-                                    </m:e>
-                                    <m:sub>
-                                      <m:r>
-                                        <a:rPr lang="en-US" sz="3900" i="1">
-                                          <a:latin typeface="Cambria Math" panose="02040503050406030204" pitchFamily="18" charset="0"/>
-                                        </a:rPr>
-                                        <m:t>𝑡</m:t>
-                                      </m:r>
-                                      <m:r>
-                                        <a:rPr lang="en-US" sz="3900" b="0" i="1" smtClean="0">
-                                          <a:latin typeface="Cambria Math" panose="02040503050406030204" pitchFamily="18" charset="0"/>
-                                        </a:rPr>
-                                        <m:t>+1</m:t>
-                                      </m:r>
-                                    </m:sub>
-                                  </m:sSub>
-                                </m:e>
-                              </m:d>
-                            </m:e>
-                          </m:d>
-                        </m:e>
-                      </m:func>
-                    </m:oMath>
-                  </m:oMathPara>
-                </a14:m>
-                <a:endParaRPr lang="en-US" sz="3900" dirty="0"/>
-              </a:p>
-            </p:txBody>
-          </p:sp>
-        </mc:Choice>
-        <mc:Fallback>
-          <p:sp>
-            <p:nvSpPr>
-              <p:cNvPr id="8" name="TextBox 7">
-                <a:extLst>
-                  <a:ext uri="{FF2B5EF4-FFF2-40B4-BE49-F238E27FC236}">
-                    <a16:creationId xmlns:a16="http://schemas.microsoft.com/office/drawing/2014/main" id="{B161081C-AF9C-EAB5-5874-8B3C546FF504}"/>
-                  </a:ext>
-                </a:extLst>
-              </p:cNvPr>
-              <p:cNvSpPr txBox="1">
-                <a:spLocks noRot="1" noChangeAspect="1" noMove="1" noResize="1" noEditPoints="1" noAdjustHandles="1" noChangeArrowheads="1" noChangeShapeType="1" noTextEdit="1"/>
-              </p:cNvSpPr>
-              <p:nvPr/>
-            </p:nvSpPr>
-            <p:spPr>
-              <a:xfrm>
-                <a:off x="719382" y="4328901"/>
-                <a:ext cx="11353799" cy="954172"/>
-              </a:xfrm>
-              <a:prstGeom prst="rect">
-                <a:avLst/>
-              </a:prstGeom>
-              <a:blipFill>
-                <a:blip r:embed="rId4"/>
-                <a:stretch>
-                  <a:fillRect b="-5195"/>
-                </a:stretch>
-              </a:blipFill>
-            </p:spPr>
-            <p:txBody>
-              <a:bodyPr/>
-              <a:lstStyle/>
-              <a:p>
-                <a:r>
-                  <a:rPr lang="en-US">
-                    <a:noFill/>
-                  </a:rPr>
-                  <a:t> </a:t>
-                </a:r>
-              </a:p>
-            </p:txBody>
-          </p:sp>
-        </mc:Fallback>
-      </mc:AlternateContent>
-      <p:grpSp>
-        <p:nvGrpSpPr>
-          <p:cNvPr id="16" name="Group 15">
-            <a:extLst>
-              <a:ext uri="{FF2B5EF4-FFF2-40B4-BE49-F238E27FC236}">
-                <a16:creationId xmlns:a16="http://schemas.microsoft.com/office/drawing/2014/main" id="{D244EABC-6A65-E3BC-0C4B-7425FD88DEE9}"/>
-              </a:ext>
-            </a:extLst>
-          </p:cNvPr>
-          <p:cNvGrpSpPr/>
-          <p:nvPr/>
-        </p:nvGrpSpPr>
-        <p:grpSpPr>
-          <a:xfrm>
-            <a:off x="7569878" y="4928618"/>
-            <a:ext cx="4532599" cy="1911158"/>
-            <a:chOff x="7640663" y="4928685"/>
-            <a:chExt cx="4532599" cy="1911158"/>
-          </a:xfrm>
-        </p:grpSpPr>
-        <p:sp>
-          <p:nvSpPr>
-            <p:cNvPr id="10" name="TextBox 9">
-              <a:extLst>
-                <a:ext uri="{FF2B5EF4-FFF2-40B4-BE49-F238E27FC236}">
-                  <a16:creationId xmlns:a16="http://schemas.microsoft.com/office/drawing/2014/main" id="{2064DA2F-4022-9A23-E2C9-1C97E0FD2B08}"/>
-                </a:ext>
-              </a:extLst>
-            </p:cNvPr>
-            <p:cNvSpPr txBox="1"/>
-            <p:nvPr/>
-          </p:nvSpPr>
-          <p:spPr>
-            <a:xfrm>
-              <a:off x="8947033" y="5639514"/>
-              <a:ext cx="3226229" cy="1200329"/>
-            </a:xfrm>
-            <a:prstGeom prst="rect">
-              <a:avLst/>
-            </a:prstGeom>
-            <a:solidFill>
-              <a:schemeClr val="bg1"/>
-            </a:solidFill>
-          </p:spPr>
-          <p:txBody>
-            <a:bodyPr wrap="square" rtlCol="0">
-              <a:spAutoFit/>
-            </a:bodyPr>
-            <a:lstStyle/>
-            <a:p>
-              <a:pPr algn="ctr"/>
-              <a:r>
-                <a:rPr lang="en-US" sz="2400" dirty="0">
-                  <a:solidFill>
-                    <a:schemeClr val="accent1"/>
-                  </a:solidFill>
-                </a:rPr>
-                <a:t>How well I expect to do with the resulting situation next year</a:t>
-              </a:r>
-            </a:p>
-          </p:txBody>
-        </p:sp>
-        <p:sp>
-          <p:nvSpPr>
-            <p:cNvPr id="11" name="Right Brace 10">
-              <a:extLst>
-                <a:ext uri="{FF2B5EF4-FFF2-40B4-BE49-F238E27FC236}">
-                  <a16:creationId xmlns:a16="http://schemas.microsoft.com/office/drawing/2014/main" id="{4EB32768-DE53-5593-95A3-9249B39B4106}"/>
-                </a:ext>
-              </a:extLst>
-            </p:cNvPr>
-            <p:cNvSpPr/>
-            <p:nvPr/>
-          </p:nvSpPr>
-          <p:spPr>
-            <a:xfrm rot="5400000">
-              <a:off x="9423396" y="3145952"/>
-              <a:ext cx="590664" cy="4156129"/>
-            </a:xfrm>
-            <a:prstGeom prst="rightBrace">
-              <a:avLst>
-                <a:gd name="adj1" fmla="val 8333"/>
-                <a:gd name="adj2" fmla="val 50373"/>
-              </a:avLst>
-            </a:prstGeom>
-            <a:ln w="38100"/>
-          </p:spPr>
-          <p:style>
-            <a:lnRef idx="2">
-              <a:schemeClr val="accent1"/>
-            </a:lnRef>
-            <a:fillRef idx="0">
-              <a:schemeClr val="accent1"/>
-            </a:fillRef>
-            <a:effectRef idx="1">
-              <a:schemeClr val="accent1"/>
-            </a:effectRef>
-            <a:fontRef idx="minor">
-              <a:schemeClr val="tx1"/>
-            </a:fontRef>
-          </p:style>
-          <p:txBody>
-            <a:bodyPr rtlCol="0" anchor="ctr"/>
-            <a:lstStyle/>
-            <a:p>
-              <a:pPr algn="ctr"/>
-              <a:endParaRPr lang="en-US" dirty="0"/>
-            </a:p>
-          </p:txBody>
-        </p:sp>
-      </p:grpSp>
-      <p:grpSp>
-        <p:nvGrpSpPr>
-          <p:cNvPr id="15" name="Group 14">
-            <a:extLst>
-              <a:ext uri="{FF2B5EF4-FFF2-40B4-BE49-F238E27FC236}">
-                <a16:creationId xmlns:a16="http://schemas.microsoft.com/office/drawing/2014/main" id="{EA0376CA-DA12-03AB-A9B9-21B0DA04CE31}"/>
-              </a:ext>
-            </a:extLst>
-          </p:cNvPr>
-          <p:cNvGrpSpPr/>
-          <p:nvPr/>
-        </p:nvGrpSpPr>
-        <p:grpSpPr>
-          <a:xfrm>
-            <a:off x="5879498" y="5022915"/>
-            <a:ext cx="1606015" cy="1291412"/>
-            <a:chOff x="6150249" y="5067946"/>
-            <a:chExt cx="1606015" cy="1291412"/>
-          </a:xfrm>
-        </p:grpSpPr>
-        <p:sp>
-          <p:nvSpPr>
-            <p:cNvPr id="9" name="TextBox 8">
-              <a:extLst>
-                <a:ext uri="{FF2B5EF4-FFF2-40B4-BE49-F238E27FC236}">
-                  <a16:creationId xmlns:a16="http://schemas.microsoft.com/office/drawing/2014/main" id="{C467BCAF-37B0-38ED-1119-7E0972A24682}"/>
-                </a:ext>
-              </a:extLst>
-            </p:cNvPr>
-            <p:cNvSpPr txBox="1"/>
-            <p:nvPr/>
-          </p:nvSpPr>
-          <p:spPr>
-            <a:xfrm>
-              <a:off x="6150249" y="5528361"/>
-              <a:ext cx="1606015" cy="830997"/>
-            </a:xfrm>
-            <a:prstGeom prst="rect">
-              <a:avLst/>
-            </a:prstGeom>
-            <a:noFill/>
-          </p:spPr>
-          <p:txBody>
-            <a:bodyPr wrap="square" rtlCol="0">
-              <a:spAutoFit/>
-            </a:bodyPr>
-            <a:lstStyle/>
-            <a:p>
-              <a:pPr algn="ctr"/>
-              <a:r>
-                <a:rPr lang="en-US" sz="2400" dirty="0">
-                  <a:solidFill>
-                    <a:schemeClr val="accent3"/>
-                  </a:solidFill>
-                </a:rPr>
-                <a:t>Discount factor</a:t>
-              </a:r>
-            </a:p>
-          </p:txBody>
-        </p:sp>
-        <p:cxnSp>
-          <p:nvCxnSpPr>
-            <p:cNvPr id="13" name="Straight Arrow Connector 12">
-              <a:extLst>
-                <a:ext uri="{FF2B5EF4-FFF2-40B4-BE49-F238E27FC236}">
-                  <a16:creationId xmlns:a16="http://schemas.microsoft.com/office/drawing/2014/main" id="{E5FB79C8-73C1-DD92-71DF-2B1A5DF2484C}"/>
-                </a:ext>
-              </a:extLst>
-            </p:cNvPr>
-            <p:cNvCxnSpPr>
-              <a:stCxn id="9" idx="0"/>
-            </p:cNvCxnSpPr>
-            <p:nvPr/>
-          </p:nvCxnSpPr>
-          <p:spPr>
-            <a:xfrm flipV="1">
-              <a:off x="6953257" y="5067946"/>
-              <a:ext cx="191462" cy="460415"/>
-            </a:xfrm>
-            <a:prstGeom prst="straightConnector1">
-              <a:avLst/>
-            </a:prstGeom>
-            <a:ln w="38100">
-              <a:solidFill>
-                <a:schemeClr val="accent3"/>
-              </a:solidFill>
-              <a:tailEnd type="triangle"/>
-            </a:ln>
-          </p:spPr>
-          <p:style>
-            <a:lnRef idx="2">
-              <a:schemeClr val="accent1"/>
-            </a:lnRef>
-            <a:fillRef idx="0">
-              <a:schemeClr val="accent1"/>
-            </a:fillRef>
-            <a:effectRef idx="1">
-              <a:schemeClr val="accent1"/>
-            </a:effectRef>
-            <a:fontRef idx="minor">
-              <a:schemeClr val="tx1"/>
-            </a:fontRef>
-          </p:style>
-        </p:cxnSp>
-      </p:grpSp>
-      <p:grpSp>
-        <p:nvGrpSpPr>
-          <p:cNvPr id="7" name="Group 6">
-            <a:extLst>
-              <a:ext uri="{FF2B5EF4-FFF2-40B4-BE49-F238E27FC236}">
-                <a16:creationId xmlns:a16="http://schemas.microsoft.com/office/drawing/2014/main" id="{C2BF8602-43EB-0F52-FA30-FE578731A3FD}"/>
-              </a:ext>
-            </a:extLst>
-          </p:cNvPr>
-          <p:cNvGrpSpPr/>
-          <p:nvPr/>
-        </p:nvGrpSpPr>
-        <p:grpSpPr>
-          <a:xfrm>
-            <a:off x="576024" y="4937697"/>
-            <a:ext cx="2988104" cy="1821334"/>
-            <a:chOff x="576024" y="4937697"/>
-            <a:chExt cx="2988104" cy="1821334"/>
-          </a:xfrm>
-        </p:grpSpPr>
-        <p:sp>
-          <p:nvSpPr>
-            <p:cNvPr id="4" name="TextBox 3">
-              <a:extLst>
-                <a:ext uri="{FF2B5EF4-FFF2-40B4-BE49-F238E27FC236}">
-                  <a16:creationId xmlns:a16="http://schemas.microsoft.com/office/drawing/2014/main" id="{B0E41160-AAF4-E537-C85E-2DAA5CF8864A}"/>
-                </a:ext>
-              </a:extLst>
-            </p:cNvPr>
-            <p:cNvSpPr txBox="1"/>
-            <p:nvPr/>
-          </p:nvSpPr>
-          <p:spPr>
-            <a:xfrm>
-              <a:off x="576024" y="5558702"/>
-              <a:ext cx="2741909" cy="1200329"/>
-            </a:xfrm>
-            <a:prstGeom prst="rect">
-              <a:avLst/>
-            </a:prstGeom>
-            <a:noFill/>
-          </p:spPr>
-          <p:txBody>
-            <a:bodyPr wrap="square" rtlCol="0">
-              <a:spAutoFit/>
-            </a:bodyPr>
-            <a:lstStyle/>
-            <a:p>
-              <a:pPr algn="ctr"/>
-              <a:r>
-                <a:rPr lang="en-US" sz="2400" dirty="0">
-                  <a:solidFill>
-                    <a:schemeClr val="accent1"/>
-                  </a:solidFill>
-                </a:rPr>
-                <a:t>The best I can do with my situation this year (time t)</a:t>
-              </a:r>
-            </a:p>
-          </p:txBody>
-        </p:sp>
-        <p:sp>
-          <p:nvSpPr>
-            <p:cNvPr id="20" name="Right Brace 19">
-              <a:extLst>
-                <a:ext uri="{FF2B5EF4-FFF2-40B4-BE49-F238E27FC236}">
-                  <a16:creationId xmlns:a16="http://schemas.microsoft.com/office/drawing/2014/main" id="{E360CAF0-145B-CF53-97AF-80448B8B11BC}"/>
-                </a:ext>
-              </a:extLst>
-            </p:cNvPr>
-            <p:cNvSpPr/>
-            <p:nvPr/>
-          </p:nvSpPr>
-          <p:spPr>
-            <a:xfrm rot="5400000">
-              <a:off x="1893299" y="3866617"/>
-              <a:ext cx="599749" cy="2741909"/>
-            </a:xfrm>
-            <a:prstGeom prst="rightBrace">
-              <a:avLst>
-                <a:gd name="adj1" fmla="val 8333"/>
-                <a:gd name="adj2" fmla="val 50373"/>
-              </a:avLst>
-            </a:prstGeom>
-            <a:ln w="38100"/>
-          </p:spPr>
-          <p:style>
-            <a:lnRef idx="2">
-              <a:schemeClr val="accent1"/>
-            </a:lnRef>
-            <a:fillRef idx="0">
-              <a:schemeClr val="accent1"/>
-            </a:fillRef>
-            <a:effectRef idx="1">
-              <a:schemeClr val="accent1"/>
-            </a:effectRef>
-            <a:fontRef idx="minor">
-              <a:schemeClr val="tx1"/>
-            </a:fontRef>
-          </p:style>
-          <p:txBody>
-            <a:bodyPr rtlCol="0" anchor="ctr"/>
-            <a:lstStyle/>
-            <a:p>
-              <a:pPr algn="ctr"/>
-              <a:endParaRPr lang="en-US" dirty="0"/>
-            </a:p>
-          </p:txBody>
-        </p:sp>
-      </p:grpSp>
-      <p:grpSp>
-        <p:nvGrpSpPr>
-          <p:cNvPr id="14" name="Group 13">
-            <a:extLst>
-              <a:ext uri="{FF2B5EF4-FFF2-40B4-BE49-F238E27FC236}">
-                <a16:creationId xmlns:a16="http://schemas.microsoft.com/office/drawing/2014/main" id="{136B418F-EF8C-CE04-46CA-C15B549AB751}"/>
-              </a:ext>
-            </a:extLst>
-          </p:cNvPr>
-          <p:cNvGrpSpPr/>
-          <p:nvPr/>
-        </p:nvGrpSpPr>
-        <p:grpSpPr>
-          <a:xfrm>
-            <a:off x="4185835" y="3011577"/>
-            <a:ext cx="3454828" cy="1377277"/>
-            <a:chOff x="4422835" y="3048873"/>
-            <a:chExt cx="3454828" cy="1377277"/>
-          </a:xfrm>
-        </p:grpSpPr>
-        <p:sp>
-          <p:nvSpPr>
-            <p:cNvPr id="6" name="TextBox 5">
-              <a:extLst>
-                <a:ext uri="{FF2B5EF4-FFF2-40B4-BE49-F238E27FC236}">
-                  <a16:creationId xmlns:a16="http://schemas.microsoft.com/office/drawing/2014/main" id="{1CED9CEA-DE44-197C-1EB1-DCAFA75502D8}"/>
-                </a:ext>
-              </a:extLst>
-            </p:cNvPr>
-            <p:cNvSpPr txBox="1"/>
-            <p:nvPr/>
-          </p:nvSpPr>
-          <p:spPr>
-            <a:xfrm>
-              <a:off x="4422835" y="3048873"/>
-              <a:ext cx="3454828" cy="830997"/>
-            </a:xfrm>
-            <a:prstGeom prst="rect">
-              <a:avLst/>
-            </a:prstGeom>
-            <a:noFill/>
-          </p:spPr>
-          <p:txBody>
-            <a:bodyPr wrap="square" rtlCol="0">
-              <a:spAutoFit/>
-            </a:bodyPr>
-            <a:lstStyle/>
-            <a:p>
-              <a:pPr algn="ctr"/>
-              <a:r>
-                <a:rPr lang="en-US" sz="2400" dirty="0">
-                  <a:solidFill>
-                    <a:schemeClr val="accent2"/>
-                  </a:solidFill>
-                </a:rPr>
-                <a:t>Utility that I got from my consumption this year</a:t>
-              </a:r>
-            </a:p>
-          </p:txBody>
-        </p:sp>
-        <p:sp>
-          <p:nvSpPr>
-            <p:cNvPr id="21" name="Right Brace 20">
-              <a:extLst>
-                <a:ext uri="{FF2B5EF4-FFF2-40B4-BE49-F238E27FC236}">
-                  <a16:creationId xmlns:a16="http://schemas.microsoft.com/office/drawing/2014/main" id="{D92072FF-1144-4CC6-58E7-3E817F32A3A3}"/>
-                </a:ext>
-              </a:extLst>
-            </p:cNvPr>
-            <p:cNvSpPr/>
-            <p:nvPr/>
-          </p:nvSpPr>
-          <p:spPr>
-            <a:xfrm rot="16200000">
-              <a:off x="5600309" y="3579160"/>
-              <a:ext cx="537268" cy="1156711"/>
-            </a:xfrm>
-            <a:prstGeom prst="rightBrace">
-              <a:avLst>
-                <a:gd name="adj1" fmla="val 8333"/>
-                <a:gd name="adj2" fmla="val 50373"/>
-              </a:avLst>
-            </a:prstGeom>
-            <a:ln w="38100">
-              <a:solidFill>
-                <a:schemeClr val="accent2"/>
-              </a:solidFill>
-            </a:ln>
-          </p:spPr>
-          <p:style>
-            <a:lnRef idx="2">
-              <a:schemeClr val="accent1"/>
-            </a:lnRef>
-            <a:fillRef idx="0">
-              <a:schemeClr val="accent1"/>
-            </a:fillRef>
-            <a:effectRef idx="1">
-              <a:schemeClr val="accent1"/>
-            </a:effectRef>
-            <a:fontRef idx="minor">
-              <a:schemeClr val="tx1"/>
-            </a:fontRef>
-          </p:style>
-          <p:txBody>
-            <a:bodyPr rtlCol="0" anchor="ctr"/>
-            <a:lstStyle/>
-            <a:p>
-              <a:pPr algn="ctr"/>
-              <a:endParaRPr lang="en-US" dirty="0"/>
-            </a:p>
-          </p:txBody>
-        </p:sp>
-      </p:grpSp>
-      <p:grpSp>
-        <p:nvGrpSpPr>
-          <p:cNvPr id="12" name="Group 11">
-            <a:extLst>
-              <a:ext uri="{FF2B5EF4-FFF2-40B4-BE49-F238E27FC236}">
-                <a16:creationId xmlns:a16="http://schemas.microsoft.com/office/drawing/2014/main" id="{F5493929-60DE-96BB-BE2F-655D1C546AA1}"/>
-              </a:ext>
-            </a:extLst>
-          </p:cNvPr>
-          <p:cNvGrpSpPr/>
-          <p:nvPr/>
-        </p:nvGrpSpPr>
-        <p:grpSpPr>
-          <a:xfrm>
-            <a:off x="3245604" y="5202186"/>
-            <a:ext cx="2583051" cy="1482608"/>
-            <a:chOff x="3245604" y="5202186"/>
-            <a:chExt cx="2583051" cy="1482608"/>
-          </a:xfrm>
-        </p:grpSpPr>
-        <p:sp>
-          <p:nvSpPr>
-            <p:cNvPr id="5" name="TextBox 4">
-              <a:extLst>
-                <a:ext uri="{FF2B5EF4-FFF2-40B4-BE49-F238E27FC236}">
-                  <a16:creationId xmlns:a16="http://schemas.microsoft.com/office/drawing/2014/main" id="{5BB9EB67-05E8-6173-CFC7-E7251ACAE129}"/>
-                </a:ext>
-              </a:extLst>
-            </p:cNvPr>
-            <p:cNvSpPr txBox="1"/>
-            <p:nvPr/>
-          </p:nvSpPr>
-          <p:spPr>
-            <a:xfrm>
-              <a:off x="3245604" y="5669131"/>
-              <a:ext cx="2583051" cy="1015663"/>
-            </a:xfrm>
-            <a:prstGeom prst="rect">
-              <a:avLst/>
-            </a:prstGeom>
-            <a:noFill/>
-          </p:spPr>
-          <p:txBody>
-            <a:bodyPr wrap="square" rtlCol="0">
-              <a:spAutoFit/>
-            </a:bodyPr>
-            <a:lstStyle/>
-            <a:p>
-              <a:pPr algn="ctr"/>
-              <a:r>
-                <a:rPr lang="en-US" sz="2000" dirty="0">
-                  <a:solidFill>
-                    <a:schemeClr val="accent5"/>
-                  </a:solidFill>
-                </a:rPr>
-                <a:t>Make the best choice over consumption next year (time t+1)</a:t>
-              </a:r>
-            </a:p>
-          </p:txBody>
-        </p:sp>
-        <p:sp>
-          <p:nvSpPr>
-            <p:cNvPr id="22" name="Right Brace 21">
-              <a:extLst>
-                <a:ext uri="{FF2B5EF4-FFF2-40B4-BE49-F238E27FC236}">
-                  <a16:creationId xmlns:a16="http://schemas.microsoft.com/office/drawing/2014/main" id="{D895204C-E243-DFC9-E908-7B5D78CCBB2C}"/>
-                </a:ext>
-              </a:extLst>
-            </p:cNvPr>
-            <p:cNvSpPr/>
-            <p:nvPr/>
-          </p:nvSpPr>
-          <p:spPr>
-            <a:xfrm rot="5400000">
-              <a:off x="4307777" y="4893465"/>
-              <a:ext cx="466946" cy="1084387"/>
-            </a:xfrm>
-            <a:prstGeom prst="rightBrace">
-              <a:avLst>
-                <a:gd name="adj1" fmla="val 8333"/>
-                <a:gd name="adj2" fmla="val 50373"/>
-              </a:avLst>
-            </a:prstGeom>
-            <a:ln w="38100">
-              <a:solidFill>
-                <a:schemeClr val="accent5"/>
-              </a:solidFill>
-            </a:ln>
-          </p:spPr>
-          <p:style>
-            <a:lnRef idx="2">
-              <a:schemeClr val="accent1"/>
-            </a:lnRef>
-            <a:fillRef idx="0">
-              <a:schemeClr val="accent1"/>
-            </a:fillRef>
-            <a:effectRef idx="1">
-              <a:schemeClr val="accent1"/>
-            </a:effectRef>
-            <a:fontRef idx="minor">
-              <a:schemeClr val="tx1"/>
-            </a:fontRef>
-          </p:style>
-          <p:txBody>
-            <a:bodyPr rtlCol="0" anchor="ctr"/>
-            <a:lstStyle/>
-            <a:p>
-              <a:pPr algn="ctr"/>
-              <a:endParaRPr lang="en-US" dirty="0"/>
-            </a:p>
-          </p:txBody>
-        </p:sp>
-      </p:grpSp>
-      <p:grpSp>
-        <p:nvGrpSpPr>
-          <p:cNvPr id="29" name="Group 28">
-            <a:extLst>
-              <a:ext uri="{FF2B5EF4-FFF2-40B4-BE49-F238E27FC236}">
-                <a16:creationId xmlns:a16="http://schemas.microsoft.com/office/drawing/2014/main" id="{B9402662-EA1A-9B27-B143-B447EAB2AD09}"/>
-              </a:ext>
-            </a:extLst>
-          </p:cNvPr>
-          <p:cNvGrpSpPr/>
-          <p:nvPr/>
-        </p:nvGrpSpPr>
-        <p:grpSpPr>
-          <a:xfrm>
-            <a:off x="10065900" y="109390"/>
-            <a:ext cx="2946868" cy="1165923"/>
-            <a:chOff x="9523459" y="42653"/>
-            <a:chExt cx="2946868" cy="1165923"/>
-          </a:xfrm>
-        </p:grpSpPr>
-        <mc:AlternateContent xmlns:mc="http://schemas.openxmlformats.org/markup-compatibility/2006" xmlns:a14="http://schemas.microsoft.com/office/drawing/2010/main">
-          <mc:Choice Requires="a14">
-            <p:sp>
-              <p:nvSpPr>
-                <p:cNvPr id="23" name="TextBox 22">
-                  <a:extLst>
-                    <a:ext uri="{FF2B5EF4-FFF2-40B4-BE49-F238E27FC236}">
-                      <a16:creationId xmlns:a16="http://schemas.microsoft.com/office/drawing/2014/main" id="{46DFE79D-1FD6-2AEE-8A69-28FF8697EC43}"/>
-                    </a:ext>
-                  </a:extLst>
-                </p:cNvPr>
-                <p:cNvSpPr txBox="1"/>
-                <p:nvPr/>
-              </p:nvSpPr>
-              <p:spPr>
-                <a:xfrm>
-                  <a:off x="9523459" y="42653"/>
-                  <a:ext cx="2503225" cy="400110"/>
-                </a:xfrm>
-                <a:prstGeom prst="rect">
-                  <a:avLst/>
-                </a:prstGeom>
-                <a:noFill/>
-              </p:spPr>
-              <p:txBody>
-                <a:bodyPr wrap="square">
-                  <a:spAutoFit/>
-                </a:bodyPr>
-                <a:lstStyle/>
-                <a:p>
-                  <a14:m>
-                    <m:oMath xmlns:m="http://schemas.openxmlformats.org/officeDocument/2006/math">
-                      <m:sSub>
-                        <m:sSubPr>
-                          <m:ctrlPr>
-                            <a:rPr lang="en-US" sz="2000" b="0" i="1" smtClean="0">
-                              <a:solidFill>
-                                <a:schemeClr val="accent1"/>
-                              </a:solidFill>
-                              <a:latin typeface="Cambria Math" panose="02040503050406030204" pitchFamily="18" charset="0"/>
-                            </a:rPr>
-                          </m:ctrlPr>
-                        </m:sSubPr>
-                        <m:e>
-                          <m:r>
-                            <a:rPr lang="en-US" sz="2000" b="0" i="1" smtClean="0">
-                              <a:solidFill>
-                                <a:schemeClr val="accent1"/>
-                              </a:solidFill>
-                              <a:latin typeface="Cambria Math" panose="02040503050406030204" pitchFamily="18" charset="0"/>
-                            </a:rPr>
-                            <m:t>𝐴</m:t>
-                          </m:r>
-                        </m:e>
-                        <m:sub>
-                          <m:r>
-                            <a:rPr lang="en-US" sz="2000" b="0" i="1" smtClean="0">
-                              <a:solidFill>
-                                <a:schemeClr val="accent1"/>
-                              </a:solidFill>
-                              <a:latin typeface="Cambria Math" panose="02040503050406030204" pitchFamily="18" charset="0"/>
-                            </a:rPr>
-                            <m:t>𝑡</m:t>
-                          </m:r>
-                        </m:sub>
-                      </m:sSub>
-                    </m:oMath>
-                  </a14:m>
-                  <a:r>
-                    <a:rPr lang="en-US" sz="2000" dirty="0">
-                      <a:solidFill>
-                        <a:schemeClr val="accent1"/>
-                      </a:solidFill>
-                    </a:rPr>
-                    <a:t>: Wealth</a:t>
-                  </a:r>
-                </a:p>
-              </p:txBody>
-            </p:sp>
-          </mc:Choice>
-          <mc:Fallback xmlns="">
-            <p:sp>
-              <p:nvSpPr>
-                <p:cNvPr id="23" name="TextBox 22">
-                  <a:extLst>
-                    <a:ext uri="{FF2B5EF4-FFF2-40B4-BE49-F238E27FC236}">
-                      <a16:creationId xmlns:a16="http://schemas.microsoft.com/office/drawing/2014/main" id="{79B9A7A0-55B9-9DC8-14E6-DA118F40DE6C}"/>
-                    </a:ext>
-                  </a:extLst>
-                </p:cNvPr>
-                <p:cNvSpPr txBox="1">
-                  <a:spLocks noRot="1" noChangeAspect="1" noMove="1" noResize="1" noEditPoints="1" noAdjustHandles="1" noChangeArrowheads="1" noChangeShapeType="1" noTextEdit="1"/>
-                </p:cNvSpPr>
-                <p:nvPr/>
-              </p:nvSpPr>
-              <p:spPr>
-                <a:xfrm>
-                  <a:off x="9523459" y="42653"/>
-                  <a:ext cx="2503225" cy="400110"/>
-                </a:xfrm>
-                <a:prstGeom prst="rect">
-                  <a:avLst/>
-                </a:prstGeom>
-                <a:blipFill>
-                  <a:blip r:embed="rId5"/>
-                  <a:stretch>
-                    <a:fillRect t="-3030" b="-27273"/>
-                  </a:stretch>
-                </a:blipFill>
-              </p:spPr>
-              <p:txBody>
-                <a:bodyPr/>
-                <a:lstStyle/>
-                <a:p>
-                  <a:r>
-                    <a:rPr lang="en-US">
-                      <a:noFill/>
-                    </a:rPr>
-                    <a:t> </a:t>
-                  </a:r>
-                </a:p>
-              </p:txBody>
-            </p:sp>
-          </mc:Fallback>
-        </mc:AlternateContent>
-        <mc:AlternateContent xmlns:mc="http://schemas.openxmlformats.org/markup-compatibility/2006" xmlns:a14="http://schemas.microsoft.com/office/drawing/2010/main">
-          <mc:Choice Requires="a14">
-            <p:sp>
-              <p:nvSpPr>
-                <p:cNvPr id="24" name="TextBox 23">
-                  <a:extLst>
-                    <a:ext uri="{FF2B5EF4-FFF2-40B4-BE49-F238E27FC236}">
-                      <a16:creationId xmlns:a16="http://schemas.microsoft.com/office/drawing/2014/main" id="{1FBEE08D-F3A6-A8A2-3B22-36E4EA70F399}"/>
-                    </a:ext>
-                  </a:extLst>
-                </p:cNvPr>
-                <p:cNvSpPr txBox="1"/>
-                <p:nvPr/>
-              </p:nvSpPr>
-              <p:spPr>
-                <a:xfrm>
-                  <a:off x="9523460" y="412791"/>
-                  <a:ext cx="2007280" cy="400110"/>
-                </a:xfrm>
-                <a:prstGeom prst="rect">
-                  <a:avLst/>
-                </a:prstGeom>
-                <a:noFill/>
-              </p:spPr>
-              <p:txBody>
-                <a:bodyPr wrap="square">
-                  <a:spAutoFit/>
-                </a:bodyPr>
-                <a:lstStyle/>
-                <a:p>
-                  <a14:m>
-                    <m:oMath xmlns:m="http://schemas.openxmlformats.org/officeDocument/2006/math">
-                      <m:sSub>
-                        <m:sSubPr>
-                          <m:ctrlPr>
-                            <a:rPr lang="en-US" sz="2000" b="0" i="1" smtClean="0">
-                              <a:solidFill>
-                                <a:schemeClr val="accent1"/>
-                              </a:solidFill>
-                              <a:latin typeface="Cambria Math" panose="02040503050406030204" pitchFamily="18" charset="0"/>
-                            </a:rPr>
-                          </m:ctrlPr>
-                        </m:sSubPr>
-                        <m:e>
-                          <m:r>
-                            <a:rPr lang="en-US" sz="2000" b="0" i="1" smtClean="0">
-                              <a:solidFill>
-                                <a:schemeClr val="accent1"/>
-                              </a:solidFill>
-                              <a:latin typeface="Cambria Math" panose="02040503050406030204" pitchFamily="18" charset="0"/>
-                            </a:rPr>
-                            <m:t>𝑦</m:t>
-                          </m:r>
-                        </m:e>
-                        <m:sub>
-                          <m:r>
-                            <a:rPr lang="en-US" sz="2000" b="0" i="1" smtClean="0">
-                              <a:solidFill>
-                                <a:schemeClr val="accent1"/>
-                              </a:solidFill>
-                              <a:latin typeface="Cambria Math" panose="02040503050406030204" pitchFamily="18" charset="0"/>
-                            </a:rPr>
-                            <m:t>𝑡</m:t>
-                          </m:r>
-                        </m:sub>
-                      </m:sSub>
-                    </m:oMath>
-                  </a14:m>
-                  <a:r>
-                    <a:rPr lang="en-US" sz="2000" dirty="0">
-                      <a:solidFill>
-                        <a:schemeClr val="accent1"/>
-                      </a:solidFill>
-                    </a:rPr>
-                    <a:t>: Income</a:t>
-                  </a:r>
-                </a:p>
-              </p:txBody>
-            </p:sp>
-          </mc:Choice>
-          <mc:Fallback xmlns="">
-            <p:sp>
-              <p:nvSpPr>
-                <p:cNvPr id="24" name="TextBox 23">
-                  <a:extLst>
-                    <a:ext uri="{FF2B5EF4-FFF2-40B4-BE49-F238E27FC236}">
-                      <a16:creationId xmlns:a16="http://schemas.microsoft.com/office/drawing/2014/main" id="{187848DB-E57A-FE3C-3517-D79CCCFD5785}"/>
-                    </a:ext>
-                  </a:extLst>
-                </p:cNvPr>
-                <p:cNvSpPr txBox="1">
-                  <a:spLocks noRot="1" noChangeAspect="1" noMove="1" noResize="1" noEditPoints="1" noAdjustHandles="1" noChangeArrowheads="1" noChangeShapeType="1" noTextEdit="1"/>
-                </p:cNvSpPr>
-                <p:nvPr/>
-              </p:nvSpPr>
-              <p:spPr>
-                <a:xfrm>
-                  <a:off x="9523460" y="412791"/>
-                  <a:ext cx="2007280" cy="400110"/>
-                </a:xfrm>
-                <a:prstGeom prst="rect">
-                  <a:avLst/>
-                </a:prstGeom>
-                <a:blipFill>
-                  <a:blip r:embed="rId6"/>
-                  <a:stretch>
-                    <a:fillRect t="-3030" b="-27273"/>
-                  </a:stretch>
-                </a:blipFill>
-              </p:spPr>
-              <p:txBody>
-                <a:bodyPr/>
-                <a:lstStyle/>
-                <a:p>
-                  <a:r>
-                    <a:rPr lang="en-US">
-                      <a:noFill/>
-                    </a:rPr>
-                    <a:t> </a:t>
-                  </a:r>
-                </a:p>
-              </p:txBody>
-            </p:sp>
-          </mc:Fallback>
-        </mc:AlternateContent>
-        <mc:AlternateContent xmlns:mc="http://schemas.openxmlformats.org/markup-compatibility/2006" xmlns:a14="http://schemas.microsoft.com/office/drawing/2010/main">
-          <mc:Choice Requires="a14">
-            <p:sp>
-              <p:nvSpPr>
-                <p:cNvPr id="25" name="TextBox 24">
-                  <a:extLst>
-                    <a:ext uri="{FF2B5EF4-FFF2-40B4-BE49-F238E27FC236}">
-                      <a16:creationId xmlns:a16="http://schemas.microsoft.com/office/drawing/2014/main" id="{28FEDEB4-CE77-E43E-9FE1-22F0F3018566}"/>
-                    </a:ext>
-                  </a:extLst>
-                </p:cNvPr>
-                <p:cNvSpPr txBox="1"/>
-                <p:nvPr/>
-              </p:nvSpPr>
-              <p:spPr>
-                <a:xfrm>
-                  <a:off x="9523459" y="808466"/>
-                  <a:ext cx="2946868" cy="400110"/>
-                </a:xfrm>
-                <a:prstGeom prst="rect">
-                  <a:avLst/>
-                </a:prstGeom>
-                <a:noFill/>
-              </p:spPr>
-              <p:txBody>
-                <a:bodyPr wrap="square">
-                  <a:spAutoFit/>
-                </a:bodyPr>
-                <a:lstStyle/>
-                <a:p>
-                  <a14:m>
-                    <m:oMath xmlns:m="http://schemas.openxmlformats.org/officeDocument/2006/math">
-                      <m:sSub>
-                        <m:sSubPr>
-                          <m:ctrlPr>
-                            <a:rPr lang="en-US" sz="2000" b="0" i="1" smtClean="0">
-                              <a:solidFill>
-                                <a:schemeClr val="accent1"/>
-                              </a:solidFill>
-                              <a:latin typeface="Cambria Math" panose="02040503050406030204" pitchFamily="18" charset="0"/>
-                            </a:rPr>
-                          </m:ctrlPr>
-                        </m:sSubPr>
-                        <m:e>
-                          <m:r>
-                            <a:rPr lang="en-US" sz="2000" b="0" i="1" smtClean="0">
-                              <a:solidFill>
-                                <a:schemeClr val="accent1"/>
-                              </a:solidFill>
-                              <a:latin typeface="Cambria Math" panose="02040503050406030204" pitchFamily="18" charset="0"/>
-                            </a:rPr>
-                            <m:t>𝑐</m:t>
-                          </m:r>
-                        </m:e>
-                        <m:sub>
-                          <m:r>
-                            <a:rPr lang="en-US" sz="2000" b="0" i="1" smtClean="0">
-                              <a:solidFill>
-                                <a:schemeClr val="accent1"/>
-                              </a:solidFill>
-                              <a:latin typeface="Cambria Math" panose="02040503050406030204" pitchFamily="18" charset="0"/>
-                            </a:rPr>
-                            <m:t>𝑡</m:t>
-                          </m:r>
-                        </m:sub>
-                      </m:sSub>
-                    </m:oMath>
-                  </a14:m>
-                  <a:r>
-                    <a:rPr lang="en-US" sz="2000" dirty="0">
-                      <a:solidFill>
-                        <a:schemeClr val="accent1"/>
-                      </a:solidFill>
-                    </a:rPr>
-                    <a:t>: Consumption</a:t>
-                  </a:r>
-                </a:p>
-              </p:txBody>
-            </p:sp>
-          </mc:Choice>
-          <mc:Fallback xmlns="">
-            <p:sp>
-              <p:nvSpPr>
-                <p:cNvPr id="25" name="TextBox 24">
-                  <a:extLst>
-                    <a:ext uri="{FF2B5EF4-FFF2-40B4-BE49-F238E27FC236}">
-                      <a16:creationId xmlns:a16="http://schemas.microsoft.com/office/drawing/2014/main" id="{6482F2E2-030D-324A-E6E9-4F83059595F3}"/>
-                    </a:ext>
-                  </a:extLst>
-                </p:cNvPr>
-                <p:cNvSpPr txBox="1">
-                  <a:spLocks noRot="1" noChangeAspect="1" noMove="1" noResize="1" noEditPoints="1" noAdjustHandles="1" noChangeArrowheads="1" noChangeShapeType="1" noTextEdit="1"/>
-                </p:cNvSpPr>
-                <p:nvPr/>
-              </p:nvSpPr>
-              <p:spPr>
-                <a:xfrm>
-                  <a:off x="9523459" y="808466"/>
-                  <a:ext cx="2946868" cy="400110"/>
-                </a:xfrm>
-                <a:prstGeom prst="rect">
-                  <a:avLst/>
-                </a:prstGeom>
-                <a:blipFill>
-                  <a:blip r:embed="rId7"/>
-                  <a:stretch>
-                    <a:fillRect t="-6250" b="-28125"/>
-                  </a:stretch>
-                </a:blipFill>
-              </p:spPr>
-              <p:txBody>
-                <a:bodyPr/>
-                <a:lstStyle/>
-                <a:p>
-                  <a:r>
-                    <a:rPr lang="en-US">
-                      <a:noFill/>
-                    </a:rPr>
-                    <a:t> </a:t>
-                  </a:r>
-                </a:p>
-              </p:txBody>
-            </p:sp>
-          </mc:Fallback>
-        </mc:AlternateContent>
-      </p:grpSp>
-    </p:spTree>
-    <p:extLst>
-      <p:ext uri="{BB962C8B-B14F-4D97-AF65-F5344CB8AC3E}">
-        <p14:creationId xmlns:p14="http://schemas.microsoft.com/office/powerpoint/2010/main" val="1705830316"/>
-      </p:ext>
-    </p:extLst>
-  </p:cSld>
-  <p:clrMapOvr>
-    <a:masterClrMapping/>
-  </p:clrMapOvr>
-  <p:timing>
-    <p:tnLst>
-      <p:par>
-        <p:cTn id="1" dur="indefinite" restart="never" nodeType="tmRoot">
-          <p:childTnLst>
-            <p:seq concurrent="1" nextAc="seek">
-              <p:cTn id="2" dur="indefinite" nodeType="mainSeq">
-                <p:childTnLst>
-                  <p:par>
-                    <p:cTn id="3" fill="hold">
-                      <p:stCondLst>
-                        <p:cond delay="indefinite"/>
-                      </p:stCondLst>
-                      <p:childTnLst>
-                        <p:par>
-                          <p:cTn id="4" fill="hold">
-                            <p:stCondLst>
-                              <p:cond delay="0"/>
-                            </p:stCondLst>
-                            <p:childTnLst>
-                              <p:par>
-                                <p:cTn id="5" presetID="1" presetClass="entr" presetSubtype="0" fill="hold" grpId="0" nodeType="clickEffect">
-                                  <p:stCondLst>
-                                    <p:cond delay="0"/>
-                                  </p:stCondLst>
-                                  <p:childTnLst>
-                                    <p:set>
-                                      <p:cBhvr>
-                                        <p:cTn id="6" dur="1" fill="hold">
-                                          <p:stCondLst>
-                                            <p:cond delay="0"/>
-                                          </p:stCondLst>
-                                        </p:cTn>
-                                        <p:tgtEl>
-                                          <p:spTgt spid="3">
-                                            <p:txEl>
-                                              <p:pRg st="0" end="0"/>
-                                            </p:txEl>
-                                          </p:spTgt>
-                                        </p:tgtEl>
-                                        <p:attrNameLst>
-                                          <p:attrName>style.visibility</p:attrName>
-                                        </p:attrNameLst>
-                                      </p:cBhvr>
-                                      <p:to>
-                                        <p:strVal val="visible"/>
-                                      </p:to>
-                                    </p:set>
-                                  </p:childTnLst>
-                                </p:cTn>
-                              </p:par>
-                            </p:childTnLst>
-                          </p:cTn>
-                        </p:par>
-                      </p:childTnLst>
-                    </p:cTn>
-                  </p:par>
-                  <p:par>
-                    <p:cTn id="7" fill="hold">
-                      <p:stCondLst>
-                        <p:cond delay="indefinite"/>
-                      </p:stCondLst>
-                      <p:childTnLst>
-                        <p:par>
-                          <p:cTn id="8" fill="hold">
-                            <p:stCondLst>
-                              <p:cond delay="0"/>
-                            </p:stCondLst>
-                            <p:childTnLst>
-                              <p:par>
-                                <p:cTn id="9" presetID="1" presetClass="entr" presetSubtype="0" fill="hold" grpId="0" nodeType="clickEffect">
-                                  <p:stCondLst>
-                                    <p:cond delay="0"/>
-                                  </p:stCondLst>
-                                  <p:childTnLst>
-                                    <p:set>
-                                      <p:cBhvr>
-                                        <p:cTn id="10" dur="1" fill="hold">
-                                          <p:stCondLst>
-                                            <p:cond delay="0"/>
-                                          </p:stCondLst>
-                                        </p:cTn>
-                                        <p:tgtEl>
-                                          <p:spTgt spid="3">
-                                            <p:txEl>
-                                              <p:pRg st="1" end="1"/>
-                                            </p:txEl>
-                                          </p:spTgt>
-                                        </p:tgtEl>
-                                        <p:attrNameLst>
-                                          <p:attrName>style.visibility</p:attrName>
-                                        </p:attrNameLst>
-                                      </p:cBhvr>
-                                      <p:to>
-                                        <p:strVal val="visible"/>
-                                      </p:to>
-                                    </p:set>
-                                  </p:childTnLst>
-                                </p:cTn>
-                              </p:par>
-                            </p:childTnLst>
-                          </p:cTn>
-                        </p:par>
-                      </p:childTnLst>
-                    </p:cTn>
-                  </p:par>
-                  <p:par>
-                    <p:cTn id="11" fill="hold">
-                      <p:stCondLst>
-                        <p:cond delay="indefinite"/>
-                      </p:stCondLst>
-                      <p:childTnLst>
-                        <p:par>
-                          <p:cTn id="12" fill="hold">
-                            <p:stCondLst>
-                              <p:cond delay="0"/>
-                            </p:stCondLst>
-                            <p:childTnLst>
-                              <p:par>
-                                <p:cTn id="13" presetID="1" presetClass="entr" presetSubtype="0" fill="hold" grpId="0" nodeType="clickEffect">
-                                  <p:stCondLst>
-                                    <p:cond delay="0"/>
-                                  </p:stCondLst>
-                                  <p:childTnLst>
-                                    <p:set>
-                                      <p:cBhvr>
-                                        <p:cTn id="14" dur="1" fill="hold">
-                                          <p:stCondLst>
-                                            <p:cond delay="0"/>
-                                          </p:stCondLst>
-                                        </p:cTn>
-                                        <p:tgtEl>
-                                          <p:spTgt spid="8"/>
-                                        </p:tgtEl>
-                                        <p:attrNameLst>
-                                          <p:attrName>style.visibility</p:attrName>
-                                        </p:attrNameLst>
-                                      </p:cBhvr>
-                                      <p:to>
-                                        <p:strVal val="visible"/>
-                                      </p:to>
-                                    </p:set>
-                                  </p:childTnLst>
-                                </p:cTn>
-                              </p:par>
-                            </p:childTnLst>
-                          </p:cTn>
-                        </p:par>
-                      </p:childTnLst>
-                    </p:cTn>
-                  </p:par>
-                  <p:par>
-                    <p:cTn id="15" fill="hold">
-                      <p:stCondLst>
-                        <p:cond delay="indefinite"/>
-                      </p:stCondLst>
-                      <p:childTnLst>
-                        <p:par>
-                          <p:cTn id="16" fill="hold">
-                            <p:stCondLst>
-                              <p:cond delay="0"/>
-                            </p:stCondLst>
-                            <p:childTnLst>
-                              <p:par>
-                                <p:cTn id="17" presetID="1" presetClass="entr" presetSubtype="0" fill="hold" nodeType="clickEffect">
-                                  <p:stCondLst>
-                                    <p:cond delay="0"/>
-                                  </p:stCondLst>
-                                  <p:childTnLst>
-                                    <p:set>
-                                      <p:cBhvr>
-                                        <p:cTn id="18" dur="1" fill="hold">
-                                          <p:stCondLst>
-                                            <p:cond delay="0"/>
-                                          </p:stCondLst>
-                                        </p:cTn>
-                                        <p:tgtEl>
-                                          <p:spTgt spid="7"/>
-                                        </p:tgtEl>
-                                        <p:attrNameLst>
-                                          <p:attrName>style.visibility</p:attrName>
-                                        </p:attrNameLst>
-                                      </p:cBhvr>
-                                      <p:to>
-                                        <p:strVal val="visible"/>
-                                      </p:to>
-                                    </p:set>
-                                  </p:childTnLst>
-                                </p:cTn>
-                              </p:par>
-                            </p:childTnLst>
-                          </p:cTn>
-                        </p:par>
-                      </p:childTnLst>
-                    </p:cTn>
-                  </p:par>
-                  <p:par>
-                    <p:cTn id="19" fill="hold">
-                      <p:stCondLst>
-                        <p:cond delay="indefinite"/>
-                      </p:stCondLst>
-                      <p:childTnLst>
-                        <p:par>
-                          <p:cTn id="20" fill="hold">
-                            <p:stCondLst>
-                              <p:cond delay="0"/>
-                            </p:stCondLst>
-                            <p:childTnLst>
-                              <p:par>
-                                <p:cTn id="21" presetID="1" presetClass="entr" presetSubtype="0" fill="hold" nodeType="clickEffect">
-                                  <p:stCondLst>
-                                    <p:cond delay="0"/>
-                                  </p:stCondLst>
-                                  <p:childTnLst>
-                                    <p:set>
-                                      <p:cBhvr>
-                                        <p:cTn id="22" dur="1" fill="hold">
-                                          <p:stCondLst>
-                                            <p:cond delay="0"/>
-                                          </p:stCondLst>
-                                        </p:cTn>
-                                        <p:tgtEl>
-                                          <p:spTgt spid="12"/>
-                                        </p:tgtEl>
-                                        <p:attrNameLst>
-                                          <p:attrName>style.visibility</p:attrName>
-                                        </p:attrNameLst>
-                                      </p:cBhvr>
-                                      <p:to>
-                                        <p:strVal val="visible"/>
-                                      </p:to>
-                                    </p:set>
-                                  </p:childTnLst>
-                                </p:cTn>
-                              </p:par>
-                            </p:childTnLst>
-                          </p:cTn>
-                        </p:par>
-                      </p:childTnLst>
-                    </p:cTn>
-                  </p:par>
-                  <p:par>
-                    <p:cTn id="23" fill="hold">
-                      <p:stCondLst>
-                        <p:cond delay="indefinite"/>
-                      </p:stCondLst>
-                      <p:childTnLst>
-                        <p:par>
-                          <p:cTn id="24" fill="hold">
-                            <p:stCondLst>
-                              <p:cond delay="0"/>
-                            </p:stCondLst>
-                            <p:childTnLst>
-                              <p:par>
-                                <p:cTn id="25" presetID="1" presetClass="entr" presetSubtype="0" fill="hold" nodeType="clickEffect">
-                                  <p:stCondLst>
-                                    <p:cond delay="0"/>
-                                  </p:stCondLst>
-                                  <p:childTnLst>
-                                    <p:set>
-                                      <p:cBhvr>
-                                        <p:cTn id="26" dur="1" fill="hold">
-                                          <p:stCondLst>
-                                            <p:cond delay="0"/>
-                                          </p:stCondLst>
-                                        </p:cTn>
-                                        <p:tgtEl>
-                                          <p:spTgt spid="14"/>
-                                        </p:tgtEl>
-                                        <p:attrNameLst>
-                                          <p:attrName>style.visibility</p:attrName>
-                                        </p:attrNameLst>
-                                      </p:cBhvr>
-                                      <p:to>
-                                        <p:strVal val="visible"/>
-                                      </p:to>
-                                    </p:set>
-                                  </p:childTnLst>
-                                </p:cTn>
-                              </p:par>
-                            </p:childTnLst>
-                          </p:cTn>
-                        </p:par>
-                      </p:childTnLst>
-                    </p:cTn>
-                  </p:par>
-                  <p:par>
-                    <p:cTn id="27" fill="hold">
-                      <p:stCondLst>
-                        <p:cond delay="indefinite"/>
-                      </p:stCondLst>
-                      <p:childTnLst>
-                        <p:par>
-                          <p:cTn id="28" fill="hold">
-                            <p:stCondLst>
-                              <p:cond delay="0"/>
-                            </p:stCondLst>
-                            <p:childTnLst>
-                              <p:par>
-                                <p:cTn id="29" presetID="1" presetClass="entr" presetSubtype="0" fill="hold" nodeType="clickEffect">
-                                  <p:stCondLst>
-                                    <p:cond delay="0"/>
-                                  </p:stCondLst>
-                                  <p:childTnLst>
-                                    <p:set>
-                                      <p:cBhvr>
-                                        <p:cTn id="30" dur="1" fill="hold">
-                                          <p:stCondLst>
-                                            <p:cond delay="0"/>
-                                          </p:stCondLst>
-                                        </p:cTn>
-                                        <p:tgtEl>
-                                          <p:spTgt spid="15"/>
-                                        </p:tgtEl>
-                                        <p:attrNameLst>
-                                          <p:attrName>style.visibility</p:attrName>
-                                        </p:attrNameLst>
-                                      </p:cBhvr>
-                                      <p:to>
-                                        <p:strVal val="visible"/>
-                                      </p:to>
-                                    </p:set>
-                                  </p:childTnLst>
-                                </p:cTn>
-                              </p:par>
-                            </p:childTnLst>
-                          </p:cTn>
-                        </p:par>
-                      </p:childTnLst>
-                    </p:cTn>
-                  </p:par>
-                  <p:par>
-                    <p:cTn id="31" fill="hold">
-                      <p:stCondLst>
-                        <p:cond delay="indefinite"/>
-                      </p:stCondLst>
-                      <p:childTnLst>
-                        <p:par>
-                          <p:cTn id="32" fill="hold">
-                            <p:stCondLst>
-                              <p:cond delay="0"/>
-                            </p:stCondLst>
-                            <p:childTnLst>
-                              <p:par>
-                                <p:cTn id="33" presetID="1" presetClass="entr" presetSubtype="0" fill="hold" nodeType="clickEffect">
-                                  <p:stCondLst>
-                                    <p:cond delay="0"/>
-                                  </p:stCondLst>
-                                  <p:childTnLst>
-                                    <p:set>
-                                      <p:cBhvr>
-                                        <p:cTn id="34" dur="1" fill="hold">
-                                          <p:stCondLst>
-                                            <p:cond delay="0"/>
-                                          </p:stCondLst>
-                                        </p:cTn>
-                                        <p:tgtEl>
-                                          <p:spTgt spid="16"/>
-                                        </p:tgtEl>
-                                        <p:attrNameLst>
-                                          <p:attrName>style.visibility</p:attrName>
-                                        </p:attrNameLst>
-                                      </p:cBhvr>
-                                      <p:to>
-                                        <p:strVal val="visible"/>
-                                      </p:to>
-                                    </p:set>
-                                  </p:childTnLst>
-                                </p:cTn>
-                              </p:par>
-                            </p:childTnLst>
-                          </p:cTn>
-                        </p:par>
-                      </p:childTnLst>
-                    </p:cTn>
-                  </p:par>
-                </p:childTnLst>
-              </p:cTn>
-              <p:prevCondLst>
-                <p:cond evt="onPrev" delay="0">
-                  <p:tgtEl>
-                    <p:sldTgt/>
-                  </p:tgtEl>
-                </p:cond>
-              </p:prevCondLst>
-              <p:nextCondLst>
-                <p:cond evt="onNext" delay="0">
-                  <p:tgtEl>
-                    <p:sldTgt/>
-                  </p:tgtEl>
-                </p:cond>
-              </p:nextCondLst>
-            </p:seq>
-          </p:childTnLst>
-        </p:cTn>
-      </p:par>
-    </p:tnLst>
-    <p:bldLst>
-      <p:bldP spid="3" grpId="0" build="p"/>
-      <p:bldP spid="8" grpId="0"/>
-    </p:bldLst>
-  </p:timing>
-</p:sld>
-</file>
-
-<file path=ppt/slides/slide26.xml><?xml version="1.0" encoding="utf-8"?>
 <p:sld xmlns:a="http://schemas.openxmlformats.org/drawingml/2006/main" xmlns:r="http://schemas.openxmlformats.org/officeDocument/2006/relationships" xmlns:p="http://schemas.openxmlformats.org/presentationml/2006/main">
   <p:cSld>
     <p:spTree>
@@ -24243,8 +21918,8 @@
             <a:chExt cx="4245809" cy="2243702"/>
           </a:xfrm>
         </p:grpSpPr>
-        <mc:AlternateContent xmlns:mc="http://schemas.openxmlformats.org/markup-compatibility/2006">
-          <mc:Choice xmlns:a14="http://schemas.microsoft.com/office/drawing/2010/main" Requires="a14">
+        <mc:AlternateContent xmlns:mc="http://schemas.openxmlformats.org/markup-compatibility/2006" xmlns:a14="http://schemas.microsoft.com/office/drawing/2010/main">
+          <mc:Choice Requires="a14">
             <p:sp>
               <p:nvSpPr>
                 <p:cNvPr id="8" name="TextBox 7">
@@ -24325,7 +22000,7 @@
               </p:txBody>
             </p:sp>
           </mc:Choice>
-          <mc:Fallback>
+          <mc:Fallback xmlns="">
             <p:sp>
               <p:nvSpPr>
                 <p:cNvPr id="8" name="TextBox 7">
@@ -24566,8 +22241,8 @@
             </a:p>
           </p:txBody>
         </p:sp>
-        <mc:AlternateContent xmlns:mc="http://schemas.openxmlformats.org/markup-compatibility/2006">
-          <mc:Choice xmlns:a14="http://schemas.microsoft.com/office/drawing/2010/main" Requires="a14">
+        <mc:AlternateContent xmlns:mc="http://schemas.openxmlformats.org/markup-compatibility/2006" xmlns:a14="http://schemas.microsoft.com/office/drawing/2010/main">
+          <mc:Choice Requires="a14">
             <p:sp>
               <p:nvSpPr>
                 <p:cNvPr id="17" name="TextBox 16">
@@ -24710,7 +22385,7 @@
               </p:txBody>
             </p:sp>
           </mc:Choice>
-          <mc:Fallback>
+          <mc:Fallback xmlns="">
             <p:sp>
               <p:nvSpPr>
                 <p:cNvPr id="17" name="TextBox 16">
@@ -24933,8 +22608,8 @@
             </p:style>
           </p:cxnSp>
         </p:grpSp>
-        <mc:AlternateContent xmlns:mc="http://schemas.openxmlformats.org/markup-compatibility/2006">
-          <mc:Choice xmlns:a14="http://schemas.microsoft.com/office/drawing/2010/main" Requires="a14">
+        <mc:AlternateContent xmlns:mc="http://schemas.openxmlformats.org/markup-compatibility/2006" xmlns:a14="http://schemas.microsoft.com/office/drawing/2010/main">
+          <mc:Choice Requires="a14">
             <p:sp>
               <p:nvSpPr>
                 <p:cNvPr id="18" name="TextBox 17">
@@ -24996,7 +22671,7 @@
               </p:txBody>
             </p:sp>
           </mc:Choice>
-          <mc:Fallback>
+          <mc:Fallback xmlns="">
             <p:sp>
               <p:nvSpPr>
                 <p:cNvPr id="18" name="TextBox 17">
@@ -25250,7 +22925,7 @@
 </p:sld>
 </file>
 
-<file path=ppt/slides/slide27.xml><?xml version="1.0" encoding="utf-8"?>
+<file path=ppt/slides/slide26.xml><?xml version="1.0" encoding="utf-8"?>
 <p:sld xmlns:a="http://schemas.openxmlformats.org/drawingml/2006/main" xmlns:r="http://schemas.openxmlformats.org/officeDocument/2006/relationships" xmlns:p="http://schemas.openxmlformats.org/presentationml/2006/main">
   <p:cSld>
     <p:spTree>
@@ -26483,7 +24158,7 @@
 </p:sld>
 </file>
 
-<file path=ppt/slides/slide28.xml><?xml version="1.0" encoding="utf-8"?>
+<file path=ppt/slides/slide27.xml><?xml version="1.0" encoding="utf-8"?>
 <p:sld xmlns:a="http://schemas.openxmlformats.org/drawingml/2006/main" xmlns:r="http://schemas.openxmlformats.org/officeDocument/2006/relationships" xmlns:p="http://schemas.openxmlformats.org/presentationml/2006/main">
   <p:cSld>
     <p:spTree>
@@ -27184,7 +24859,7 @@
 </p:sld>
 </file>
 
-<file path=ppt/slides/slide29.xml><?xml version="1.0" encoding="utf-8"?>
+<file path=ppt/slides/slide28.xml><?xml version="1.0" encoding="utf-8"?>
 <p:sld xmlns:a="http://schemas.openxmlformats.org/drawingml/2006/main" xmlns:r="http://schemas.openxmlformats.org/officeDocument/2006/relationships" xmlns:p="http://schemas.openxmlformats.org/presentationml/2006/main">
   <p:cSld>
     <p:spTree>
@@ -27312,8 +24987,8 @@
           </a:p>
         </p:txBody>
       </p:sp>
-      <mc:AlternateContent xmlns:mc="http://schemas.openxmlformats.org/markup-compatibility/2006">
-        <mc:Choice xmlns:a14="http://schemas.microsoft.com/office/drawing/2010/main" Requires="a14">
+      <mc:AlternateContent xmlns:mc="http://schemas.openxmlformats.org/markup-compatibility/2006" xmlns:a14="http://schemas.microsoft.com/office/drawing/2010/main">
+        <mc:Choice Requires="a14">
           <p:sp>
             <p:nvSpPr>
               <p:cNvPr id="4" name="TextBox 3">
@@ -27628,7 +25303,7 @@
             </p:txBody>
           </p:sp>
         </mc:Choice>
-        <mc:Fallback>
+        <mc:Fallback xmlns="">
           <p:sp>
             <p:nvSpPr>
               <p:cNvPr id="4" name="TextBox 3">
@@ -27686,432 +25361,7 @@
 </p:sld>
 </file>
 
-<file path=ppt/slides/slide3.xml><?xml version="1.0" encoding="utf-8"?>
-<p:sld xmlns:a="http://schemas.openxmlformats.org/drawingml/2006/main" xmlns:r="http://schemas.openxmlformats.org/officeDocument/2006/relationships" xmlns:p="http://schemas.openxmlformats.org/presentationml/2006/main">
-  <p:cSld>
-    <p:spTree>
-      <p:nvGrpSpPr>
-        <p:cNvPr id="1" name=""/>
-        <p:cNvGrpSpPr/>
-        <p:nvPr/>
-      </p:nvGrpSpPr>
-      <p:grpSpPr>
-        <a:xfrm>
-          <a:off x="0" y="0"/>
-          <a:ext cx="0" cy="0"/>
-          <a:chOff x="0" y="0"/>
-          <a:chExt cx="0" cy="0"/>
-        </a:xfrm>
-      </p:grpSpPr>
-      <p:sp>
-        <p:nvSpPr>
-          <p:cNvPr id="2" name="Title 1">
-            <a:extLst>
-              <a:ext uri="{FF2B5EF4-FFF2-40B4-BE49-F238E27FC236}">
-                <a16:creationId xmlns:a16="http://schemas.microsoft.com/office/drawing/2014/main" id="{3C441ACC-27D1-2B76-E4F1-45CF4446EE19}"/>
-              </a:ext>
-            </a:extLst>
-          </p:cNvPr>
-          <p:cNvSpPr>
-            <a:spLocks noGrp="1"/>
-          </p:cNvSpPr>
-          <p:nvPr>
-            <p:ph type="title"/>
-          </p:nvPr>
-        </p:nvSpPr>
-        <p:spPr/>
-        <p:txBody>
-          <a:bodyPr/>
-          <a:lstStyle/>
-          <a:p>
-            <a:r>
-              <a:rPr lang="en-US" dirty="0"/>
-              <a:t>New Unit!  The effects of UBI</a:t>
-            </a:r>
-            <a:br>
-              <a:rPr lang="en-US" dirty="0"/>
-            </a:br>
-            <a:r>
-              <a:rPr lang="en-US" sz="3200" dirty="0">
-                <a:solidFill>
-                  <a:schemeClr val="bg2">
-                    <a:lumMod val="25000"/>
-                  </a:schemeClr>
-                </a:solidFill>
-              </a:rPr>
-              <a:t>UBI = </a:t>
-            </a:r>
-            <a:r>
-              <a:rPr lang="en-US" sz="3200" b="1" dirty="0">
-                <a:solidFill>
-                  <a:schemeClr val="bg2">
-                    <a:lumMod val="25000"/>
-                  </a:schemeClr>
-                </a:solidFill>
-              </a:rPr>
-              <a:t>U</a:t>
-            </a:r>
-            <a:r>
-              <a:rPr lang="en-US" sz="3200" dirty="0">
-                <a:solidFill>
-                  <a:schemeClr val="bg2">
-                    <a:lumMod val="25000"/>
-                  </a:schemeClr>
-                </a:solidFill>
-              </a:rPr>
-              <a:t>niversal </a:t>
-            </a:r>
-            <a:r>
-              <a:rPr lang="en-US" sz="3200" b="1" dirty="0">
-                <a:solidFill>
-                  <a:schemeClr val="bg2">
-                    <a:lumMod val="25000"/>
-                  </a:schemeClr>
-                </a:solidFill>
-              </a:rPr>
-              <a:t>B</a:t>
-            </a:r>
-            <a:r>
-              <a:rPr lang="en-US" sz="3200" dirty="0">
-                <a:solidFill>
-                  <a:schemeClr val="bg2">
-                    <a:lumMod val="25000"/>
-                  </a:schemeClr>
-                </a:solidFill>
-              </a:rPr>
-              <a:t>asic </a:t>
-            </a:r>
-            <a:r>
-              <a:rPr lang="en-US" sz="3200" b="1" dirty="0">
-                <a:solidFill>
-                  <a:schemeClr val="bg2">
-                    <a:lumMod val="25000"/>
-                  </a:schemeClr>
-                </a:solidFill>
-              </a:rPr>
-              <a:t>I</a:t>
-            </a:r>
-            <a:r>
-              <a:rPr lang="en-US" sz="3200" dirty="0">
-                <a:solidFill>
-                  <a:schemeClr val="bg2">
-                    <a:lumMod val="25000"/>
-                  </a:schemeClr>
-                </a:solidFill>
-              </a:rPr>
-              <a:t>ncome</a:t>
-            </a:r>
-            <a:endParaRPr lang="en-US" dirty="0">
-              <a:solidFill>
-                <a:schemeClr val="bg2">
-                  <a:lumMod val="25000"/>
-                </a:schemeClr>
-              </a:solidFill>
-            </a:endParaRPr>
-          </a:p>
-        </p:txBody>
-      </p:sp>
-      <p:sp>
-        <p:nvSpPr>
-          <p:cNvPr id="3" name="Content Placeholder 2">
-            <a:extLst>
-              <a:ext uri="{FF2B5EF4-FFF2-40B4-BE49-F238E27FC236}">
-                <a16:creationId xmlns:a16="http://schemas.microsoft.com/office/drawing/2014/main" id="{F039F790-C179-61D7-248E-F91E113C0903}"/>
-              </a:ext>
-            </a:extLst>
-          </p:cNvPr>
-          <p:cNvSpPr>
-            <a:spLocks noGrp="1"/>
-          </p:cNvSpPr>
-          <p:nvPr>
-            <p:ph idx="1"/>
-          </p:nvPr>
-        </p:nvSpPr>
-        <p:spPr/>
-        <p:txBody>
-          <a:bodyPr/>
-          <a:lstStyle/>
-          <a:p>
-            <a:endParaRPr lang="en-US" dirty="0"/>
-          </a:p>
-          <a:p>
-            <a:r>
-              <a:rPr lang="en-US" b="1" dirty="0">
-                <a:solidFill>
-                  <a:schemeClr val="accent1"/>
-                </a:solidFill>
-              </a:rPr>
-              <a:t>Today: </a:t>
-            </a:r>
-            <a:r>
-              <a:rPr lang="en-US" dirty="0"/>
-              <a:t>Theory: the </a:t>
-            </a:r>
-            <a:r>
-              <a:rPr lang="en-US" b="1" dirty="0"/>
-              <a:t>Permanent Income Hypothesis</a:t>
-            </a:r>
-          </a:p>
-          <a:p>
-            <a:r>
-              <a:rPr lang="en-US" sz="2400" b="1" dirty="0">
-                <a:solidFill>
-                  <a:schemeClr val="accent1"/>
-                </a:solidFill>
-              </a:rPr>
-              <a:t>Next time: </a:t>
-            </a:r>
-            <a:r>
-              <a:rPr lang="en-US" sz="2400" dirty="0"/>
-              <a:t>Tools: </a:t>
-            </a:r>
-            <a:r>
-              <a:rPr lang="en-US" sz="2400" b="1" dirty="0"/>
-              <a:t>Regression! </a:t>
-            </a:r>
-          </a:p>
-          <a:p>
-            <a:r>
-              <a:rPr lang="en-US" sz="2000" b="1" dirty="0">
-                <a:solidFill>
-                  <a:schemeClr val="accent1"/>
-                </a:solidFill>
-              </a:rPr>
-              <a:t>Next next time: </a:t>
-            </a:r>
-            <a:r>
-              <a:rPr lang="en-US" sz="2000" dirty="0"/>
-              <a:t>Using the tools: </a:t>
-            </a:r>
-            <a:r>
-              <a:rPr lang="en-US" sz="2000" b="1" dirty="0"/>
-              <a:t>Some Experiments! </a:t>
-            </a:r>
-          </a:p>
-          <a:p>
-            <a:r>
-              <a:rPr lang="en-US" sz="2000" b="1" dirty="0">
-                <a:solidFill>
-                  <a:schemeClr val="accent1"/>
-                </a:solidFill>
-              </a:rPr>
-              <a:t>Next next next time: </a:t>
-            </a:r>
-            <a:r>
-              <a:rPr lang="en-US" sz="2000" dirty="0"/>
-              <a:t>Heterogeneous Treatment Effects and Random Forests</a:t>
-            </a:r>
-            <a:endParaRPr lang="en-US" sz="2000" b="1" dirty="0"/>
-          </a:p>
-        </p:txBody>
-      </p:sp>
-      <p:grpSp>
-        <p:nvGrpSpPr>
-          <p:cNvPr id="4" name="Group 3">
-            <a:extLst>
-              <a:ext uri="{FF2B5EF4-FFF2-40B4-BE49-F238E27FC236}">
-                <a16:creationId xmlns:a16="http://schemas.microsoft.com/office/drawing/2014/main" id="{F992F5FD-6301-7A2A-DBB4-5D38661087B3}"/>
-              </a:ext>
-            </a:extLst>
-          </p:cNvPr>
-          <p:cNvGrpSpPr/>
-          <p:nvPr/>
-        </p:nvGrpSpPr>
-        <p:grpSpPr>
-          <a:xfrm>
-            <a:off x="3420533" y="4516530"/>
-            <a:ext cx="6569592" cy="2127477"/>
-            <a:chOff x="5000977" y="3805330"/>
-            <a:chExt cx="6569592" cy="2127477"/>
-          </a:xfrm>
-        </p:grpSpPr>
-        <p:pic>
-          <p:nvPicPr>
-            <p:cNvPr id="5" name="Picture 4">
-              <a:extLst>
-                <a:ext uri="{FF2B5EF4-FFF2-40B4-BE49-F238E27FC236}">
-                  <a16:creationId xmlns:a16="http://schemas.microsoft.com/office/drawing/2014/main" id="{C313AD56-4998-CD0D-1BDB-64F548F13279}"/>
-                </a:ext>
-              </a:extLst>
-            </p:cNvPr>
-            <p:cNvPicPr>
-              <a:picLocks noChangeAspect="1"/>
-            </p:cNvPicPr>
-            <p:nvPr/>
-          </p:nvPicPr>
-          <p:blipFill>
-            <a:blip r:embed="rId3"/>
-            <a:stretch>
-              <a:fillRect/>
-            </a:stretch>
-          </p:blipFill>
-          <p:spPr>
-            <a:xfrm>
-              <a:off x="10651994" y="3805330"/>
-              <a:ext cx="918575" cy="2127477"/>
-            </a:xfrm>
-            <a:prstGeom prst="rect">
-              <a:avLst/>
-            </a:prstGeom>
-          </p:spPr>
-        </p:pic>
-        <p:sp>
-          <p:nvSpPr>
-            <p:cNvPr id="6" name="TextBox 5">
-              <a:extLst>
-                <a:ext uri="{FF2B5EF4-FFF2-40B4-BE49-F238E27FC236}">
-                  <a16:creationId xmlns:a16="http://schemas.microsoft.com/office/drawing/2014/main" id="{0FAEF808-0F5E-265A-46E1-35F6638446E9}"/>
-                </a:ext>
-              </a:extLst>
-            </p:cNvPr>
-            <p:cNvSpPr txBox="1"/>
-            <p:nvPr/>
-          </p:nvSpPr>
-          <p:spPr>
-            <a:xfrm>
-              <a:off x="5000977" y="3899572"/>
-              <a:ext cx="5551879" cy="1938992"/>
-            </a:xfrm>
-            <a:prstGeom prst="rect">
-              <a:avLst/>
-            </a:prstGeom>
-            <a:noFill/>
-          </p:spPr>
-          <p:txBody>
-            <a:bodyPr wrap="square" rtlCol="0">
-              <a:spAutoFit/>
-            </a:bodyPr>
-            <a:lstStyle/>
-            <a:p>
-              <a:pPr algn="r"/>
-              <a:r>
-                <a:rPr lang="en-US" sz="2000" b="1" dirty="0">
-                  <a:solidFill>
-                    <a:srgbClr val="0070C0"/>
-                  </a:solidFill>
-                </a:rPr>
-                <a:t>Universal Basic Income </a:t>
-              </a:r>
-              <a:r>
-                <a:rPr lang="en-US" sz="2000" dirty="0">
-                  <a:solidFill>
-                    <a:srgbClr val="0070C0"/>
-                  </a:solidFill>
-                </a:rPr>
-                <a:t>is a policy where everyone would get some base level of income (say, $10,000 a year), no matter what.</a:t>
-              </a:r>
-            </a:p>
-            <a:p>
-              <a:pPr algn="r"/>
-              <a:endParaRPr lang="en-US" sz="2000" dirty="0">
-                <a:solidFill>
-                  <a:srgbClr val="0070C0"/>
-                </a:solidFill>
-              </a:endParaRPr>
-            </a:p>
-            <a:p>
-              <a:pPr algn="r"/>
-              <a:r>
-                <a:rPr lang="en-US" sz="2000" dirty="0">
-                  <a:solidFill>
-                    <a:srgbClr val="0070C0"/>
-                  </a:solidFill>
-                </a:rPr>
-                <a:t>Some politicians and some Silicon Valley bajillionaires (and some others) are fans.</a:t>
-              </a:r>
-            </a:p>
-          </p:txBody>
-        </p:sp>
-      </p:grpSp>
-    </p:spTree>
-    <p:extLst>
-      <p:ext uri="{BB962C8B-B14F-4D97-AF65-F5344CB8AC3E}">
-        <p14:creationId xmlns:p14="http://schemas.microsoft.com/office/powerpoint/2010/main" val="240673853"/>
-      </p:ext>
-    </p:extLst>
-  </p:cSld>
-  <p:clrMapOvr>
-    <a:masterClrMapping/>
-  </p:clrMapOvr>
-  <p:timing>
-    <p:tnLst>
-      <p:par>
-        <p:cTn id="1" dur="indefinite" restart="never" nodeType="tmRoot">
-          <p:childTnLst>
-            <p:seq concurrent="1" nextAc="seek">
-              <p:cTn id="2" dur="indefinite" nodeType="mainSeq">
-                <p:childTnLst>
-                  <p:par>
-                    <p:cTn id="3" fill="hold">
-                      <p:stCondLst>
-                        <p:cond delay="indefinite"/>
-                      </p:stCondLst>
-                      <p:childTnLst>
-                        <p:par>
-                          <p:cTn id="4" fill="hold">
-                            <p:stCondLst>
-                              <p:cond delay="0"/>
-                            </p:stCondLst>
-                            <p:childTnLst>
-                              <p:par>
-                                <p:cTn id="5" presetID="1" presetClass="entr" presetSubtype="0" fill="hold" nodeType="clickEffect">
-                                  <p:stCondLst>
-                                    <p:cond delay="0"/>
-                                  </p:stCondLst>
-                                  <p:childTnLst>
-                                    <p:set>
-                                      <p:cBhvr>
-                                        <p:cTn id="6" dur="1" fill="hold">
-                                          <p:stCondLst>
-                                            <p:cond delay="0"/>
-                                          </p:stCondLst>
-                                        </p:cTn>
-                                        <p:tgtEl>
-                                          <p:spTgt spid="4"/>
-                                        </p:tgtEl>
-                                        <p:attrNameLst>
-                                          <p:attrName>style.visibility</p:attrName>
-                                        </p:attrNameLst>
-                                      </p:cBhvr>
-                                      <p:to>
-                                        <p:strVal val="visible"/>
-                                      </p:to>
-                                    </p:set>
-                                  </p:childTnLst>
-                                </p:cTn>
-                              </p:par>
-                            </p:childTnLst>
-                          </p:cTn>
-                        </p:par>
-                      </p:childTnLst>
-                    </p:cTn>
-                  </p:par>
-                </p:childTnLst>
-              </p:cTn>
-              <p:prevCondLst>
-                <p:cond evt="onPrev" delay="0">
-                  <p:tgtEl>
-                    <p:sldTgt/>
-                  </p:tgtEl>
-                </p:cond>
-              </p:prevCondLst>
-              <p:nextCondLst>
-                <p:cond evt="onNext" delay="0">
-                  <p:tgtEl>
-                    <p:sldTgt/>
-                  </p:tgtEl>
-                </p:cond>
-              </p:nextCondLst>
-            </p:seq>
-          </p:childTnLst>
-        </p:cTn>
-      </p:par>
-    </p:tnLst>
-  </p:timing>
-</p:sld>
-</file>
-
-<file path=ppt/slides/slide30.xml><?xml version="1.0" encoding="utf-8"?>
+<file path=ppt/slides/slide29.xml><?xml version="1.0" encoding="utf-8"?>
 <p:sld xmlns:a="http://schemas.openxmlformats.org/drawingml/2006/main" xmlns:r="http://schemas.openxmlformats.org/officeDocument/2006/relationships" xmlns:p="http://schemas.openxmlformats.org/presentationml/2006/main">
   <p:cSld>
     <p:spTree>
@@ -29400,7 +26650,432 @@
 </p:sld>
 </file>
 
-<file path=ppt/slides/slide31.xml><?xml version="1.0" encoding="utf-8"?>
+<file path=ppt/slides/slide3.xml><?xml version="1.0" encoding="utf-8"?>
+<p:sld xmlns:a="http://schemas.openxmlformats.org/drawingml/2006/main" xmlns:r="http://schemas.openxmlformats.org/officeDocument/2006/relationships" xmlns:p="http://schemas.openxmlformats.org/presentationml/2006/main">
+  <p:cSld>
+    <p:spTree>
+      <p:nvGrpSpPr>
+        <p:cNvPr id="1" name=""/>
+        <p:cNvGrpSpPr/>
+        <p:nvPr/>
+      </p:nvGrpSpPr>
+      <p:grpSpPr>
+        <a:xfrm>
+          <a:off x="0" y="0"/>
+          <a:ext cx="0" cy="0"/>
+          <a:chOff x="0" y="0"/>
+          <a:chExt cx="0" cy="0"/>
+        </a:xfrm>
+      </p:grpSpPr>
+      <p:sp>
+        <p:nvSpPr>
+          <p:cNvPr id="2" name="Title 1">
+            <a:extLst>
+              <a:ext uri="{FF2B5EF4-FFF2-40B4-BE49-F238E27FC236}">
+                <a16:creationId xmlns:a16="http://schemas.microsoft.com/office/drawing/2014/main" id="{3C441ACC-27D1-2B76-E4F1-45CF4446EE19}"/>
+              </a:ext>
+            </a:extLst>
+          </p:cNvPr>
+          <p:cNvSpPr>
+            <a:spLocks noGrp="1"/>
+          </p:cNvSpPr>
+          <p:nvPr>
+            <p:ph type="title"/>
+          </p:nvPr>
+        </p:nvSpPr>
+        <p:spPr/>
+        <p:txBody>
+          <a:bodyPr/>
+          <a:lstStyle/>
+          <a:p>
+            <a:r>
+              <a:rPr lang="en-US" dirty="0"/>
+              <a:t>New Unit!  The effects of UBI</a:t>
+            </a:r>
+            <a:br>
+              <a:rPr lang="en-US" dirty="0"/>
+            </a:br>
+            <a:r>
+              <a:rPr lang="en-US" sz="3200" dirty="0">
+                <a:solidFill>
+                  <a:schemeClr val="bg2">
+                    <a:lumMod val="25000"/>
+                  </a:schemeClr>
+                </a:solidFill>
+              </a:rPr>
+              <a:t>UBI = </a:t>
+            </a:r>
+            <a:r>
+              <a:rPr lang="en-US" sz="3200" b="1" dirty="0">
+                <a:solidFill>
+                  <a:schemeClr val="bg2">
+                    <a:lumMod val="25000"/>
+                  </a:schemeClr>
+                </a:solidFill>
+              </a:rPr>
+              <a:t>U</a:t>
+            </a:r>
+            <a:r>
+              <a:rPr lang="en-US" sz="3200" dirty="0">
+                <a:solidFill>
+                  <a:schemeClr val="bg2">
+                    <a:lumMod val="25000"/>
+                  </a:schemeClr>
+                </a:solidFill>
+              </a:rPr>
+              <a:t>niversal </a:t>
+            </a:r>
+            <a:r>
+              <a:rPr lang="en-US" sz="3200" b="1" dirty="0">
+                <a:solidFill>
+                  <a:schemeClr val="bg2">
+                    <a:lumMod val="25000"/>
+                  </a:schemeClr>
+                </a:solidFill>
+              </a:rPr>
+              <a:t>B</a:t>
+            </a:r>
+            <a:r>
+              <a:rPr lang="en-US" sz="3200" dirty="0">
+                <a:solidFill>
+                  <a:schemeClr val="bg2">
+                    <a:lumMod val="25000"/>
+                  </a:schemeClr>
+                </a:solidFill>
+              </a:rPr>
+              <a:t>asic </a:t>
+            </a:r>
+            <a:r>
+              <a:rPr lang="en-US" sz="3200" b="1" dirty="0">
+                <a:solidFill>
+                  <a:schemeClr val="bg2">
+                    <a:lumMod val="25000"/>
+                  </a:schemeClr>
+                </a:solidFill>
+              </a:rPr>
+              <a:t>I</a:t>
+            </a:r>
+            <a:r>
+              <a:rPr lang="en-US" sz="3200" dirty="0">
+                <a:solidFill>
+                  <a:schemeClr val="bg2">
+                    <a:lumMod val="25000"/>
+                  </a:schemeClr>
+                </a:solidFill>
+              </a:rPr>
+              <a:t>ncome</a:t>
+            </a:r>
+            <a:endParaRPr lang="en-US" dirty="0">
+              <a:solidFill>
+                <a:schemeClr val="bg2">
+                  <a:lumMod val="25000"/>
+                </a:schemeClr>
+              </a:solidFill>
+            </a:endParaRPr>
+          </a:p>
+        </p:txBody>
+      </p:sp>
+      <p:sp>
+        <p:nvSpPr>
+          <p:cNvPr id="3" name="Content Placeholder 2">
+            <a:extLst>
+              <a:ext uri="{FF2B5EF4-FFF2-40B4-BE49-F238E27FC236}">
+                <a16:creationId xmlns:a16="http://schemas.microsoft.com/office/drawing/2014/main" id="{F039F790-C179-61D7-248E-F91E113C0903}"/>
+              </a:ext>
+            </a:extLst>
+          </p:cNvPr>
+          <p:cNvSpPr>
+            <a:spLocks noGrp="1"/>
+          </p:cNvSpPr>
+          <p:nvPr>
+            <p:ph idx="1"/>
+          </p:nvPr>
+        </p:nvSpPr>
+        <p:spPr/>
+        <p:txBody>
+          <a:bodyPr/>
+          <a:lstStyle/>
+          <a:p>
+            <a:endParaRPr lang="en-US" dirty="0"/>
+          </a:p>
+          <a:p>
+            <a:r>
+              <a:rPr lang="en-US" b="1" dirty="0">
+                <a:solidFill>
+                  <a:schemeClr val="accent1"/>
+                </a:solidFill>
+              </a:rPr>
+              <a:t>Today: </a:t>
+            </a:r>
+            <a:r>
+              <a:rPr lang="en-US" dirty="0"/>
+              <a:t>Theory: the </a:t>
+            </a:r>
+            <a:r>
+              <a:rPr lang="en-US" b="1" dirty="0"/>
+              <a:t>Permanent Income Hypothesis</a:t>
+            </a:r>
+          </a:p>
+          <a:p>
+            <a:r>
+              <a:rPr lang="en-US" sz="2400" b="1" dirty="0">
+                <a:solidFill>
+                  <a:schemeClr val="accent1"/>
+                </a:solidFill>
+              </a:rPr>
+              <a:t>Next time: </a:t>
+            </a:r>
+            <a:r>
+              <a:rPr lang="en-US" sz="2400" dirty="0"/>
+              <a:t>Tools: </a:t>
+            </a:r>
+            <a:r>
+              <a:rPr lang="en-US" sz="2400" b="1" dirty="0"/>
+              <a:t>Regression! </a:t>
+            </a:r>
+          </a:p>
+          <a:p>
+            <a:r>
+              <a:rPr lang="en-US" sz="2000" b="1" dirty="0">
+                <a:solidFill>
+                  <a:schemeClr val="accent1"/>
+                </a:solidFill>
+              </a:rPr>
+              <a:t>Next next time: </a:t>
+            </a:r>
+            <a:r>
+              <a:rPr lang="en-US" sz="2000" dirty="0"/>
+              <a:t>Using the tools: </a:t>
+            </a:r>
+            <a:r>
+              <a:rPr lang="en-US" sz="2000" b="1" dirty="0"/>
+              <a:t>Some Experiments! </a:t>
+            </a:r>
+          </a:p>
+          <a:p>
+            <a:r>
+              <a:rPr lang="en-US" sz="2000" b="1" dirty="0">
+                <a:solidFill>
+                  <a:schemeClr val="accent1"/>
+                </a:solidFill>
+              </a:rPr>
+              <a:t>Next next next time: </a:t>
+            </a:r>
+            <a:r>
+              <a:rPr lang="en-US" sz="2000" dirty="0"/>
+              <a:t>Heterogeneous Treatment Effects and Random Forests</a:t>
+            </a:r>
+            <a:endParaRPr lang="en-US" sz="2000" b="1" dirty="0"/>
+          </a:p>
+        </p:txBody>
+      </p:sp>
+      <p:grpSp>
+        <p:nvGrpSpPr>
+          <p:cNvPr id="4" name="Group 3">
+            <a:extLst>
+              <a:ext uri="{FF2B5EF4-FFF2-40B4-BE49-F238E27FC236}">
+                <a16:creationId xmlns:a16="http://schemas.microsoft.com/office/drawing/2014/main" id="{F992F5FD-6301-7A2A-DBB4-5D38661087B3}"/>
+              </a:ext>
+            </a:extLst>
+          </p:cNvPr>
+          <p:cNvGrpSpPr/>
+          <p:nvPr/>
+        </p:nvGrpSpPr>
+        <p:grpSpPr>
+          <a:xfrm>
+            <a:off x="3420533" y="4516530"/>
+            <a:ext cx="6569592" cy="2127477"/>
+            <a:chOff x="5000977" y="3805330"/>
+            <a:chExt cx="6569592" cy="2127477"/>
+          </a:xfrm>
+        </p:grpSpPr>
+        <p:pic>
+          <p:nvPicPr>
+            <p:cNvPr id="5" name="Picture 4">
+              <a:extLst>
+                <a:ext uri="{FF2B5EF4-FFF2-40B4-BE49-F238E27FC236}">
+                  <a16:creationId xmlns:a16="http://schemas.microsoft.com/office/drawing/2014/main" id="{C313AD56-4998-CD0D-1BDB-64F548F13279}"/>
+                </a:ext>
+              </a:extLst>
+            </p:cNvPr>
+            <p:cNvPicPr>
+              <a:picLocks noChangeAspect="1"/>
+            </p:cNvPicPr>
+            <p:nvPr/>
+          </p:nvPicPr>
+          <p:blipFill>
+            <a:blip r:embed="rId3"/>
+            <a:stretch>
+              <a:fillRect/>
+            </a:stretch>
+          </p:blipFill>
+          <p:spPr>
+            <a:xfrm>
+              <a:off x="10651994" y="3805330"/>
+              <a:ext cx="918575" cy="2127477"/>
+            </a:xfrm>
+            <a:prstGeom prst="rect">
+              <a:avLst/>
+            </a:prstGeom>
+          </p:spPr>
+        </p:pic>
+        <p:sp>
+          <p:nvSpPr>
+            <p:cNvPr id="6" name="TextBox 5">
+              <a:extLst>
+                <a:ext uri="{FF2B5EF4-FFF2-40B4-BE49-F238E27FC236}">
+                  <a16:creationId xmlns:a16="http://schemas.microsoft.com/office/drawing/2014/main" id="{0FAEF808-0F5E-265A-46E1-35F6638446E9}"/>
+                </a:ext>
+              </a:extLst>
+            </p:cNvPr>
+            <p:cNvSpPr txBox="1"/>
+            <p:nvPr/>
+          </p:nvSpPr>
+          <p:spPr>
+            <a:xfrm>
+              <a:off x="5000977" y="3899572"/>
+              <a:ext cx="5551879" cy="1938992"/>
+            </a:xfrm>
+            <a:prstGeom prst="rect">
+              <a:avLst/>
+            </a:prstGeom>
+            <a:noFill/>
+          </p:spPr>
+          <p:txBody>
+            <a:bodyPr wrap="square" rtlCol="0">
+              <a:spAutoFit/>
+            </a:bodyPr>
+            <a:lstStyle/>
+            <a:p>
+              <a:pPr algn="r"/>
+              <a:r>
+                <a:rPr lang="en-US" sz="2000" b="1" dirty="0">
+                  <a:solidFill>
+                    <a:srgbClr val="0070C0"/>
+                  </a:solidFill>
+                </a:rPr>
+                <a:t>Universal Basic Income </a:t>
+              </a:r>
+              <a:r>
+                <a:rPr lang="en-US" sz="2000" dirty="0">
+                  <a:solidFill>
+                    <a:srgbClr val="0070C0"/>
+                  </a:solidFill>
+                </a:rPr>
+                <a:t>is a policy where everyone would get some base level of income (say, $10,000 a year), no matter what.</a:t>
+              </a:r>
+            </a:p>
+            <a:p>
+              <a:pPr algn="r"/>
+              <a:endParaRPr lang="en-US" sz="2000" dirty="0">
+                <a:solidFill>
+                  <a:srgbClr val="0070C0"/>
+                </a:solidFill>
+              </a:endParaRPr>
+            </a:p>
+            <a:p>
+              <a:pPr algn="r"/>
+              <a:r>
+                <a:rPr lang="en-US" sz="2000" dirty="0">
+                  <a:solidFill>
+                    <a:srgbClr val="0070C0"/>
+                  </a:solidFill>
+                </a:rPr>
+                <a:t>Some politicians and some Silicon Valley bajillionaires (and some others) are fans.</a:t>
+              </a:r>
+            </a:p>
+          </p:txBody>
+        </p:sp>
+      </p:grpSp>
+    </p:spTree>
+    <p:extLst>
+      <p:ext uri="{BB962C8B-B14F-4D97-AF65-F5344CB8AC3E}">
+        <p14:creationId xmlns:p14="http://schemas.microsoft.com/office/powerpoint/2010/main" val="240673853"/>
+      </p:ext>
+    </p:extLst>
+  </p:cSld>
+  <p:clrMapOvr>
+    <a:masterClrMapping/>
+  </p:clrMapOvr>
+  <p:timing>
+    <p:tnLst>
+      <p:par>
+        <p:cTn id="1" dur="indefinite" restart="never" nodeType="tmRoot">
+          <p:childTnLst>
+            <p:seq concurrent="1" nextAc="seek">
+              <p:cTn id="2" dur="indefinite" nodeType="mainSeq">
+                <p:childTnLst>
+                  <p:par>
+                    <p:cTn id="3" fill="hold">
+                      <p:stCondLst>
+                        <p:cond delay="indefinite"/>
+                      </p:stCondLst>
+                      <p:childTnLst>
+                        <p:par>
+                          <p:cTn id="4" fill="hold">
+                            <p:stCondLst>
+                              <p:cond delay="0"/>
+                            </p:stCondLst>
+                            <p:childTnLst>
+                              <p:par>
+                                <p:cTn id="5" presetID="1" presetClass="entr" presetSubtype="0" fill="hold" nodeType="clickEffect">
+                                  <p:stCondLst>
+                                    <p:cond delay="0"/>
+                                  </p:stCondLst>
+                                  <p:childTnLst>
+                                    <p:set>
+                                      <p:cBhvr>
+                                        <p:cTn id="6" dur="1" fill="hold">
+                                          <p:stCondLst>
+                                            <p:cond delay="0"/>
+                                          </p:stCondLst>
+                                        </p:cTn>
+                                        <p:tgtEl>
+                                          <p:spTgt spid="4"/>
+                                        </p:tgtEl>
+                                        <p:attrNameLst>
+                                          <p:attrName>style.visibility</p:attrName>
+                                        </p:attrNameLst>
+                                      </p:cBhvr>
+                                      <p:to>
+                                        <p:strVal val="visible"/>
+                                      </p:to>
+                                    </p:set>
+                                  </p:childTnLst>
+                                </p:cTn>
+                              </p:par>
+                            </p:childTnLst>
+                          </p:cTn>
+                        </p:par>
+                      </p:childTnLst>
+                    </p:cTn>
+                  </p:par>
+                </p:childTnLst>
+              </p:cTn>
+              <p:prevCondLst>
+                <p:cond evt="onPrev" delay="0">
+                  <p:tgtEl>
+                    <p:sldTgt/>
+                  </p:tgtEl>
+                </p:cond>
+              </p:prevCondLst>
+              <p:nextCondLst>
+                <p:cond evt="onNext" delay="0">
+                  <p:tgtEl>
+                    <p:sldTgt/>
+                  </p:tgtEl>
+                </p:cond>
+              </p:nextCondLst>
+            </p:seq>
+          </p:childTnLst>
+        </p:cTn>
+      </p:par>
+    </p:tnLst>
+  </p:timing>
+</p:sld>
+</file>
+
+<file path=ppt/slides/slide30.xml><?xml version="1.0" encoding="utf-8"?>
 <p:sld xmlns:a="http://schemas.openxmlformats.org/drawingml/2006/main" xmlns:r="http://schemas.openxmlformats.org/officeDocument/2006/relationships" xmlns:p="http://schemas.openxmlformats.org/presentationml/2006/main">
   <p:cSld>
     <p:spTree>
@@ -29520,7 +27195,7 @@
 </p:sld>
 </file>
 
-<file path=ppt/slides/slide32.xml><?xml version="1.0" encoding="utf-8"?>
+<file path=ppt/slides/slide31.xml><?xml version="1.0" encoding="utf-8"?>
 <p:sld xmlns:a="http://schemas.openxmlformats.org/drawingml/2006/main" xmlns:r="http://schemas.openxmlformats.org/officeDocument/2006/relationships" xmlns:p="http://schemas.openxmlformats.org/presentationml/2006/main">
   <p:cSld>
     <p:spTree>
@@ -29640,7 +27315,7 @@
 </p:sld>
 </file>
 
-<file path=ppt/slides/slide33.xml><?xml version="1.0" encoding="utf-8"?>
+<file path=ppt/slides/slide32.xml><?xml version="1.0" encoding="utf-8"?>
 <p:sld xmlns:a="http://schemas.openxmlformats.org/drawingml/2006/main" xmlns:r="http://schemas.openxmlformats.org/officeDocument/2006/relationships" xmlns:p="http://schemas.openxmlformats.org/presentationml/2006/main">
   <p:cSld>
     <p:spTree>
@@ -29780,7 +27455,7 @@
 </p:sld>
 </file>
 
-<file path=ppt/slides/slide34.xml><?xml version="1.0" encoding="utf-8"?>
+<file path=ppt/slides/slide33.xml><?xml version="1.0" encoding="utf-8"?>
 <p:sld xmlns:a="http://schemas.openxmlformats.org/drawingml/2006/main" xmlns:r="http://schemas.openxmlformats.org/officeDocument/2006/relationships" xmlns:p="http://schemas.openxmlformats.org/presentationml/2006/main">
   <p:cSld>
     <p:spTree>
@@ -30504,7 +28179,7 @@
 </p:sld>
 </file>
 
-<file path=ppt/slides/slide35.xml><?xml version="1.0" encoding="utf-8"?>
+<file path=ppt/slides/slide34.xml><?xml version="1.0" encoding="utf-8"?>
 <p:sld xmlns:a="http://schemas.openxmlformats.org/drawingml/2006/main" xmlns:r="http://schemas.openxmlformats.org/officeDocument/2006/relationships" xmlns:p="http://schemas.openxmlformats.org/presentationml/2006/main">
   <p:cSld>
     <p:spTree>
@@ -31607,7 +29282,7 @@
 </p:sld>
 </file>
 
-<file path=ppt/slides/slide36.xml><?xml version="1.0" encoding="utf-8"?>
+<file path=ppt/slides/slide35.xml><?xml version="1.0" encoding="utf-8"?>
 <p:sld xmlns:a="http://schemas.openxmlformats.org/drawingml/2006/main" xmlns:r="http://schemas.openxmlformats.org/officeDocument/2006/relationships" xmlns:p="http://schemas.openxmlformats.org/presentationml/2006/main">
   <p:cSld>
     <p:spTree>
@@ -31995,7 +29670,7 @@
 </p:sld>
 </file>
 
-<file path=ppt/slides/slide37.xml><?xml version="1.0" encoding="utf-8"?>
+<file path=ppt/slides/slide36.xml><?xml version="1.0" encoding="utf-8"?>
 <p:sld xmlns:a="http://schemas.openxmlformats.org/drawingml/2006/main" xmlns:r="http://schemas.openxmlformats.org/officeDocument/2006/relationships" xmlns:p="http://schemas.openxmlformats.org/presentationml/2006/main">
   <p:cSld>
     <p:spTree>
@@ -32407,7 +30082,7 @@
 </p:sld>
 </file>
 
-<file path=ppt/slides/slide38.xml><?xml version="1.0" encoding="utf-8"?>
+<file path=ppt/slides/slide37.xml><?xml version="1.0" encoding="utf-8"?>
 <p:sld xmlns:a="http://schemas.openxmlformats.org/drawingml/2006/main" xmlns:r="http://schemas.openxmlformats.org/officeDocument/2006/relationships" xmlns:p="http://schemas.openxmlformats.org/presentationml/2006/main">
   <p:cSld>
     <p:spTree>
@@ -32929,7 +30604,7 @@
 </p:sld>
 </file>
 
-<file path=ppt/slides/slide39.xml><?xml version="1.0" encoding="utf-8"?>
+<file path=ppt/slides/slide38.xml><?xml version="1.0" encoding="utf-8"?>
 <p:sld xmlns:a="http://schemas.openxmlformats.org/drawingml/2006/main" xmlns:r="http://schemas.openxmlformats.org/officeDocument/2006/relationships" xmlns:p="http://schemas.openxmlformats.org/presentationml/2006/main">
   <p:cSld>
     <p:spTree>
@@ -33373,150 +31048,7 @@
 </p:sld>
 </file>
 
-<file path=ppt/slides/slide4.xml><?xml version="1.0" encoding="utf-8"?>
-<p:sld xmlns:a="http://schemas.openxmlformats.org/drawingml/2006/main" xmlns:r="http://schemas.openxmlformats.org/officeDocument/2006/relationships" xmlns:p="http://schemas.openxmlformats.org/presentationml/2006/main">
-  <p:cSld>
-    <p:spTree>
-      <p:nvGrpSpPr>
-        <p:cNvPr id="1" name=""/>
-        <p:cNvGrpSpPr/>
-        <p:nvPr/>
-      </p:nvGrpSpPr>
-      <p:grpSpPr>
-        <a:xfrm>
-          <a:off x="0" y="0"/>
-          <a:ext cx="0" cy="0"/>
-          <a:chOff x="0" y="0"/>
-          <a:chExt cx="0" cy="0"/>
-        </a:xfrm>
-      </p:grpSpPr>
-      <p:sp>
-        <p:nvSpPr>
-          <p:cNvPr id="2" name="Title 1">
-            <a:extLst>
-              <a:ext uri="{FF2B5EF4-FFF2-40B4-BE49-F238E27FC236}">
-                <a16:creationId xmlns:a16="http://schemas.microsoft.com/office/drawing/2014/main" id="{77F8E971-70FC-763B-C5FD-5E39FBC4EB82}"/>
-              </a:ext>
-            </a:extLst>
-          </p:cNvPr>
-          <p:cNvSpPr>
-            <a:spLocks noGrp="1"/>
-          </p:cNvSpPr>
-          <p:nvPr>
-            <p:ph type="title"/>
-          </p:nvPr>
-        </p:nvSpPr>
-        <p:spPr/>
-        <p:txBody>
-          <a:bodyPr/>
-          <a:lstStyle/>
-          <a:p>
-            <a:r>
-              <a:rPr lang="en-US" dirty="0"/>
-              <a:t>Agenda</a:t>
-            </a:r>
-          </a:p>
-        </p:txBody>
-      </p:sp>
-      <p:sp>
-        <p:nvSpPr>
-          <p:cNvPr id="3" name="Content Placeholder 2">
-            <a:extLst>
-              <a:ext uri="{FF2B5EF4-FFF2-40B4-BE49-F238E27FC236}">
-                <a16:creationId xmlns:a16="http://schemas.microsoft.com/office/drawing/2014/main" id="{B1FD5487-3594-FBDC-0EB6-3CA1BA0BA401}"/>
-              </a:ext>
-            </a:extLst>
-          </p:cNvPr>
-          <p:cNvSpPr>
-            <a:spLocks noGrp="1"/>
-          </p:cNvSpPr>
-          <p:nvPr>
-            <p:ph idx="1"/>
-          </p:nvPr>
-        </p:nvSpPr>
-        <p:spPr/>
-        <p:txBody>
-          <a:bodyPr/>
-          <a:lstStyle/>
-          <a:p>
-            <a:pPr marL="514350" indent="-514350">
-              <a:buFont typeface="+mj-lt"/>
-              <a:buAutoNum type="arabicPeriod"/>
-            </a:pPr>
-            <a:r>
-              <a:rPr lang="en-US" dirty="0"/>
-              <a:t>Some questions</a:t>
-            </a:r>
-          </a:p>
-          <a:p>
-            <a:pPr lvl="1"/>
-            <a:r>
-              <a:rPr lang="en-US" dirty="0">
-                <a:solidFill>
-                  <a:schemeClr val="accent1"/>
-                </a:solidFill>
-              </a:rPr>
-              <a:t>How do people act when they get a bunch of money?</a:t>
-            </a:r>
-          </a:p>
-          <a:p>
-            <a:pPr marL="514350" indent="-514350">
-              <a:buFont typeface="+mj-lt"/>
-              <a:buAutoNum type="arabicPeriod"/>
-            </a:pPr>
-            <a:r>
-              <a:rPr lang="en-US" dirty="0"/>
-              <a:t>Why do these questions matter?</a:t>
-            </a:r>
-          </a:p>
-          <a:p>
-            <a:pPr lvl="1"/>
-            <a:r>
-              <a:rPr lang="en-US" dirty="0">
-                <a:solidFill>
-                  <a:schemeClr val="accent1"/>
-                </a:solidFill>
-              </a:rPr>
-              <a:t>Impact on policy decisions</a:t>
-            </a:r>
-          </a:p>
-          <a:p>
-            <a:pPr marL="514350" indent="-514350">
-              <a:buFont typeface="+mj-lt"/>
-              <a:buAutoNum type="arabicPeriod"/>
-            </a:pPr>
-            <a:r>
-              <a:rPr lang="en-US" dirty="0"/>
-              <a:t>Some theory</a:t>
-            </a:r>
-          </a:p>
-          <a:p>
-            <a:pPr lvl="1"/>
-            <a:r>
-              <a:rPr lang="en-US" dirty="0">
-                <a:solidFill>
-                  <a:schemeClr val="accent1"/>
-                </a:solidFill>
-              </a:rPr>
-              <a:t>How “should” you act if you got a bunch of money?</a:t>
-            </a:r>
-          </a:p>
-        </p:txBody>
-      </p:sp>
-    </p:spTree>
-    <p:extLst>
-      <p:ext uri="{BB962C8B-B14F-4D97-AF65-F5344CB8AC3E}">
-        <p14:creationId xmlns:p14="http://schemas.microsoft.com/office/powerpoint/2010/main" val="3216632549"/>
-      </p:ext>
-    </p:extLst>
-  </p:cSld>
-  <p:clrMapOvr>
-    <a:masterClrMapping/>
-  </p:clrMapOvr>
-</p:sld>
-</file>
-
-<file path=ppt/slides/slide40.xml><?xml version="1.0" encoding="utf-8"?>
+<file path=ppt/slides/slide39.xml><?xml version="1.0" encoding="utf-8"?>
 <p:sld xmlns:a="http://schemas.openxmlformats.org/drawingml/2006/main" xmlns:r="http://schemas.openxmlformats.org/officeDocument/2006/relationships" xmlns:p="http://schemas.openxmlformats.org/presentationml/2006/main">
   <p:cSld>
     <p:spTree>
@@ -34027,7 +31559,150 @@
 </p:sld>
 </file>
 
-<file path=ppt/slides/slide41.xml><?xml version="1.0" encoding="utf-8"?>
+<file path=ppt/slides/slide4.xml><?xml version="1.0" encoding="utf-8"?>
+<p:sld xmlns:a="http://schemas.openxmlformats.org/drawingml/2006/main" xmlns:r="http://schemas.openxmlformats.org/officeDocument/2006/relationships" xmlns:p="http://schemas.openxmlformats.org/presentationml/2006/main">
+  <p:cSld>
+    <p:spTree>
+      <p:nvGrpSpPr>
+        <p:cNvPr id="1" name=""/>
+        <p:cNvGrpSpPr/>
+        <p:nvPr/>
+      </p:nvGrpSpPr>
+      <p:grpSpPr>
+        <a:xfrm>
+          <a:off x="0" y="0"/>
+          <a:ext cx="0" cy="0"/>
+          <a:chOff x="0" y="0"/>
+          <a:chExt cx="0" cy="0"/>
+        </a:xfrm>
+      </p:grpSpPr>
+      <p:sp>
+        <p:nvSpPr>
+          <p:cNvPr id="2" name="Title 1">
+            <a:extLst>
+              <a:ext uri="{FF2B5EF4-FFF2-40B4-BE49-F238E27FC236}">
+                <a16:creationId xmlns:a16="http://schemas.microsoft.com/office/drawing/2014/main" id="{77F8E971-70FC-763B-C5FD-5E39FBC4EB82}"/>
+              </a:ext>
+            </a:extLst>
+          </p:cNvPr>
+          <p:cNvSpPr>
+            <a:spLocks noGrp="1"/>
+          </p:cNvSpPr>
+          <p:nvPr>
+            <p:ph type="title"/>
+          </p:nvPr>
+        </p:nvSpPr>
+        <p:spPr/>
+        <p:txBody>
+          <a:bodyPr/>
+          <a:lstStyle/>
+          <a:p>
+            <a:r>
+              <a:rPr lang="en-US" dirty="0"/>
+              <a:t>Agenda</a:t>
+            </a:r>
+          </a:p>
+        </p:txBody>
+      </p:sp>
+      <p:sp>
+        <p:nvSpPr>
+          <p:cNvPr id="3" name="Content Placeholder 2">
+            <a:extLst>
+              <a:ext uri="{FF2B5EF4-FFF2-40B4-BE49-F238E27FC236}">
+                <a16:creationId xmlns:a16="http://schemas.microsoft.com/office/drawing/2014/main" id="{B1FD5487-3594-FBDC-0EB6-3CA1BA0BA401}"/>
+              </a:ext>
+            </a:extLst>
+          </p:cNvPr>
+          <p:cNvSpPr>
+            <a:spLocks noGrp="1"/>
+          </p:cNvSpPr>
+          <p:nvPr>
+            <p:ph idx="1"/>
+          </p:nvPr>
+        </p:nvSpPr>
+        <p:spPr/>
+        <p:txBody>
+          <a:bodyPr/>
+          <a:lstStyle/>
+          <a:p>
+            <a:pPr marL="514350" indent="-514350">
+              <a:buFont typeface="+mj-lt"/>
+              <a:buAutoNum type="arabicPeriod"/>
+            </a:pPr>
+            <a:r>
+              <a:rPr lang="en-US" dirty="0"/>
+              <a:t>Some questions</a:t>
+            </a:r>
+          </a:p>
+          <a:p>
+            <a:pPr lvl="1"/>
+            <a:r>
+              <a:rPr lang="en-US" dirty="0">
+                <a:solidFill>
+                  <a:schemeClr val="accent1"/>
+                </a:solidFill>
+              </a:rPr>
+              <a:t>How do people act when they get a bunch of money?</a:t>
+            </a:r>
+          </a:p>
+          <a:p>
+            <a:pPr marL="514350" indent="-514350">
+              <a:buFont typeface="+mj-lt"/>
+              <a:buAutoNum type="arabicPeriod"/>
+            </a:pPr>
+            <a:r>
+              <a:rPr lang="en-US" dirty="0"/>
+              <a:t>Why do these questions matter?</a:t>
+            </a:r>
+          </a:p>
+          <a:p>
+            <a:pPr lvl="1"/>
+            <a:r>
+              <a:rPr lang="en-US" dirty="0">
+                <a:solidFill>
+                  <a:schemeClr val="accent1"/>
+                </a:solidFill>
+              </a:rPr>
+              <a:t>Impact on policy decisions</a:t>
+            </a:r>
+          </a:p>
+          <a:p>
+            <a:pPr marL="514350" indent="-514350">
+              <a:buFont typeface="+mj-lt"/>
+              <a:buAutoNum type="arabicPeriod"/>
+            </a:pPr>
+            <a:r>
+              <a:rPr lang="en-US" dirty="0"/>
+              <a:t>Some theory</a:t>
+            </a:r>
+          </a:p>
+          <a:p>
+            <a:pPr lvl="1"/>
+            <a:r>
+              <a:rPr lang="en-US" dirty="0">
+                <a:solidFill>
+                  <a:schemeClr val="accent1"/>
+                </a:solidFill>
+              </a:rPr>
+              <a:t>How “should” you act if you got a bunch of money?</a:t>
+            </a:r>
+          </a:p>
+        </p:txBody>
+      </p:sp>
+    </p:spTree>
+    <p:extLst>
+      <p:ext uri="{BB962C8B-B14F-4D97-AF65-F5344CB8AC3E}">
+        <p14:creationId xmlns:p14="http://schemas.microsoft.com/office/powerpoint/2010/main" val="3216632549"/>
+      </p:ext>
+    </p:extLst>
+  </p:cSld>
+  <p:clrMapOvr>
+    <a:masterClrMapping/>
+  </p:clrMapOvr>
+</p:sld>
+</file>
+
+<file path=ppt/slides/slide40.xml><?xml version="1.0" encoding="utf-8"?>
 <p:sld xmlns:a="http://schemas.openxmlformats.org/drawingml/2006/main" xmlns:r="http://schemas.openxmlformats.org/officeDocument/2006/relationships" xmlns:p="http://schemas.openxmlformats.org/presentationml/2006/main">
   <p:cSld>
     <p:spTree>
@@ -34113,7 +31788,7 @@
 </p:sld>
 </file>
 
-<file path=ppt/slides/slide42.xml><?xml version="1.0" encoding="utf-8"?>
+<file path=ppt/slides/slide41.xml><?xml version="1.0" encoding="utf-8"?>
 <p:sld xmlns:a="http://schemas.openxmlformats.org/drawingml/2006/main" xmlns:r="http://schemas.openxmlformats.org/officeDocument/2006/relationships" xmlns:p="http://schemas.openxmlformats.org/presentationml/2006/main">
   <p:cSld>
     <p:spTree>
@@ -34196,7 +31871,7 @@
 </p:sld>
 </file>
 
-<file path=ppt/slides/slide43.xml><?xml version="1.0" encoding="utf-8"?>
+<file path=ppt/slides/slide42.xml><?xml version="1.0" encoding="utf-8"?>
 <p:sld xmlns:a="http://schemas.openxmlformats.org/drawingml/2006/main" xmlns:r="http://schemas.openxmlformats.org/officeDocument/2006/relationships" xmlns:p="http://schemas.openxmlformats.org/presentationml/2006/main">
   <p:cSld>
     <p:spTree>
@@ -34322,7 +31997,7 @@
 </p:sld>
 </file>
 
-<file path=ppt/slides/slide44.xml><?xml version="1.0" encoding="utf-8"?>
+<file path=ppt/slides/slide43.xml><?xml version="1.0" encoding="utf-8"?>
 <p:sld xmlns:a="http://schemas.openxmlformats.org/drawingml/2006/main" xmlns:r="http://schemas.openxmlformats.org/officeDocument/2006/relationships" xmlns:p="http://schemas.openxmlformats.org/presentationml/2006/main">
   <p:cSld>
     <p:spTree>
@@ -34417,7 +32092,7 @@
 </p:sld>
 </file>
 
-<file path=ppt/slides/slide45.xml><?xml version="1.0" encoding="utf-8"?>
+<file path=ppt/slides/slide44.xml><?xml version="1.0" encoding="utf-8"?>
 <p:sld xmlns:a="http://schemas.openxmlformats.org/drawingml/2006/main" xmlns:r="http://schemas.openxmlformats.org/officeDocument/2006/relationships" xmlns:p="http://schemas.openxmlformats.org/presentationml/2006/main">
   <p:cSld>
     <p:spTree>
